--- a/web/presentation/slides/ontario-wildfire.pptx
+++ b/web/presentation/slides/ontario-wildfire.pptx
@@ -2,21 +2,21 @@
 <file path=ppt/presentation.xml><?xml version="1.0" encoding="utf-8"?>
 <p:presentation xmlns:p="http://schemas.openxmlformats.org/presentationml/2006/main">
   <p:sldMasterIdLst>
-    <p:sldMasterId xmlns:r="http://schemas.openxmlformats.org/officeDocument/2006/relationships" id="2147483648" r:id="Rb62f4cf42375405c"/>
+    <p:sldMasterId xmlns:r="http://schemas.openxmlformats.org/officeDocument/2006/relationships" id="2147483648" r:id="R6faad929b8934091"/>
   </p:sldMasterIdLst>
   <p:notesMasterIdLst>
-    <p:notesMasterId xmlns:r="http://schemas.openxmlformats.org/officeDocument/2006/relationships" r:id="Rb6742ac4f6c74c3b"/>
+    <p:notesMasterId xmlns:r="http://schemas.openxmlformats.org/officeDocument/2006/relationships" r:id="Rf79e1e24db534316"/>
   </p:notesMasterIdLst>
   <p:sldIdLst>
-    <p:sldId xmlns:r="http://schemas.openxmlformats.org/officeDocument/2006/relationships" id="256" r:id="R18f319b4cb4c4d06"/>
-    <p:sldId xmlns:r="http://schemas.openxmlformats.org/officeDocument/2006/relationships" id="257" r:id="Rf242df2b83884af8"/>
-    <p:sldId xmlns:r="http://schemas.openxmlformats.org/officeDocument/2006/relationships" id="258" r:id="R5d84f67d8e8447f0"/>
-    <p:sldId xmlns:r="http://schemas.openxmlformats.org/officeDocument/2006/relationships" id="259" r:id="R82f27f9d32ba489b"/>
-    <p:sldId xmlns:r="http://schemas.openxmlformats.org/officeDocument/2006/relationships" id="260" r:id="R5977acf5613f42cb"/>
-    <p:sldId xmlns:r="http://schemas.openxmlformats.org/officeDocument/2006/relationships" id="261" r:id="R639a4843ef954493"/>
-    <p:sldId xmlns:r="http://schemas.openxmlformats.org/officeDocument/2006/relationships" id="262" r:id="R2acee7013612423c"/>
-    <p:sldId xmlns:r="http://schemas.openxmlformats.org/officeDocument/2006/relationships" id="263" r:id="R1bb0e27ca0b544a0"/>
-    <p:sldId xmlns:r="http://schemas.openxmlformats.org/officeDocument/2006/relationships" id="264" r:id="R5ed0818ac3b04387"/>
+    <p:sldId xmlns:r="http://schemas.openxmlformats.org/officeDocument/2006/relationships" id="256" r:id="R7e3d191b73914577"/>
+    <p:sldId xmlns:r="http://schemas.openxmlformats.org/officeDocument/2006/relationships" id="257" r:id="Reafcfd6c99794297"/>
+    <p:sldId xmlns:r="http://schemas.openxmlformats.org/officeDocument/2006/relationships" id="258" r:id="R2abf5c2529d642af"/>
+    <p:sldId xmlns:r="http://schemas.openxmlformats.org/officeDocument/2006/relationships" id="259" r:id="Rca41bca734f04953"/>
+    <p:sldId xmlns:r="http://schemas.openxmlformats.org/officeDocument/2006/relationships" id="260" r:id="R3e62caa3f8644297"/>
+    <p:sldId xmlns:r="http://schemas.openxmlformats.org/officeDocument/2006/relationships" id="261" r:id="R2868d52d2f554459"/>
+    <p:sldId xmlns:r="http://schemas.openxmlformats.org/officeDocument/2006/relationships" id="262" r:id="R7d99501070b04aed"/>
+    <p:sldId xmlns:r="http://schemas.openxmlformats.org/officeDocument/2006/relationships" id="263" r:id="R714b599e586040f3"/>
+    <p:sldId xmlns:r="http://schemas.openxmlformats.org/officeDocument/2006/relationships" id="264" r:id="R02e157826a94450d"/>
   </p:sldIdLst>
   <p:sldSz cx="12192000" cy="6858000"/>
   <p:notesSz cx="6858000" cy="9144000"/>
@@ -535,7 +535,7 @@
           <a:lstStyle xmlns:a="http://schemas.openxmlformats.org/drawingml/2006/main"/>
           <a:p xmlns:a="http://schemas.openxmlformats.org/drawingml/2006/main">
             <a:r>
-              <a:t>Our historical fire source is NRCan NFDB point records, not daily operational updates. We select Ontario agency records, quarantine ambiguous identities and exclude prescribed codes, then sum observed sizes and divide by their count. No coordinates, valid daily date or nearest-weather filter removes fires from the annual target. ECCC monthly measurements become station-year summaries; only stations meeting each feature's coverage threshold contribute, with equal station weights. Join aggregates by year to obtain ten climate features and one mean-size label per year. 39,616 training fires aggregate into only 31 independent annual rows. The raw audit confirms 2021's 784,447/1,194 ratio; median fire was 0.3 ha, so large fires dominate the mean. Six later years were previously inspected in incident work. Woodland classes were screened separately and are not final predictors. The interactive map uses raw recorded 2021 locations for context, including identity-quarantined rows, distinct from the 1,194 accepted annual label records. Pixels are nearest-neighbour downsampled; location sizes are display glyphs, not fire perimeters. Schema · Independent raw-source audit · Source acquisition</a:t>
+              <a:t>Our historical fire source is NRCan NFDB point records, not daily operational updates. We select Ontario agency records, quarantine ambiguous identities and exclude prescribed codes, then sum observed sizes and divide by their count. No coordinates, valid daily date or nearest-weather filter removes fires from the annual target. ECCC monthly measurements become station-year summaries; only stations meeting each feature's coverage threshold contribute, with equal station weights. Join aggregates by year to obtain ten climate features and one mean-size label per year. 39,616 training fires aggregate into only 31 annual rows. Years can be temporally dependent. The raw audit confirms 2021's 784,447/1,194 ratio; median fire was 0.3 ha, so large fires dominate the mean. Six later years were previously inspected in incident work. Woodland classes were screened separately and are not final predictors. The interactive map uses raw recorded 2021 locations for context, including identity-quarantined rows, distinct from the 1,194 accepted annual label records. Pixels are nearest-neighbour downsampled; location sizes are display glyphs, not fire perimeters. Schema · Independent raw-source audit · Source acquisition</a:t>
             </a:r>
           </a:p>
           <a:p xmlns:a="http://schemas.openxmlformats.org/drawingml/2006/main">
@@ -725,7 +725,7 @@
           <a:lstStyle xmlns:a="http://schemas.openxmlformats.org/drawingml/2006/main"/>
           <a:p xmlns:a="http://schemas.openxmlformats.org/drawingml/2006/main">
             <a:r>
-              <a:t>In the prediction comparison, both methods receive the same predeclared four climate inputs: annual/summer temperature and annual/summer precipitation. Classical RBF compares distances; Qiskit encodes bounded angles in shallow ZZ circuits and computes squared state overlap using FidelityQuantumKernel. Both feed similarities to a classical SVR optimizer; the quantum optimizer is not trained. Each family receives 36 configurations per width/fold. RBF is better in development: 77.02 versus 86.64 hectares per fire. QSVR wins one outer block and loses two. Outer blocks are 2007–2010, 2011–2014 and 2015–2018, with three inner splits for settings. The selector experiment is separate and uses fixed ridge, not these tuned kernel results. Matched results · Classical controls</a:t>
+              <a:t>In the prediction comparison, both methods receive the same predeclared four climate inputs: annual/summer temperature and annual/summer precipitation. Classical RBF compares distances; Qiskit encodes bounded angles in shallow ZZ circuits and computes squared state overlap using FidelityQuantumKernel. Both feed similarities to a classical SVR optimizer; the feature map has no learned variational circuit parameters. Each family receives 36 configurations per width/fold. RBF is better in development: 77.02 versus 86.64 hectares per fire. QSVR wins one outer block and loses two. Outer blocks are 2007–2010, 2011–2014 and 2015–2018, with three inner splits for settings. The selector experiment is separate and uses fixed ridge, not these tuned kernel results. Matched results · Classical controls</a:t>
             </a:r>
           </a:p>
           <a:p xmlns:a="http://schemas.openxmlformats.org/drawingml/2006/main">
@@ -815,7 +815,7 @@
           <a:lstStyle xmlns:a="http://schemas.openxmlformats.org/drawingml/2006/main"/>
           <a:p xmlns:a="http://schemas.openxmlformats.org/drawingml/2006/main">
             <a:r>
-              <a:t>Each group is one Ontario year. Orange is the total recorded hectares divided by the number of size-observed fires that year: for example, 2021 averages 656.99 hectares per fire. It is neither the total area burned, an individual fire's size nor a monthly trajectory. The grey bar repeats the training-year mean of 124.63; teal and green show the four-input QSVR and RBF estimates. High-year recorded averages dwarf those estimates. None of eleven main models beats the training mean across these six years. QSVR beats matched RBF here, but both lose to the constant, so that pairwise gain is not useful skill or quantum advantage. States froze before annual evaluation; earlier incident exposure limits independence. Same-year climate remains retrospective. All final errors · Freeze and limitations</a:t>
+              <a:t>Each group is one Ontario year. Orange is the total recorded hectares divided by the number of size-observed fires that year: for example, 2021 averages 656.99 hectares per fire. It is neither the total area burned, an individual fire's size nor a monthly trajectory. The grey bar repeats the training-year mean of 124.63; teal and green show the four-input QSVR and RBF estimates. High-year recorded averages dwarf those estimates. None of eleven main models beats the training mean across these six years. QSVR beats matched RBF here, but both lose to the constant, so that pairwise gain is not useful skill or quantum advantage. Model parameters and recipes froze before annual evaluation; earlier incident exposure limits independence. Same-year climate remains retrospective. All final errors · Freeze and limitations</a:t>
             </a:r>
           </a:p>
           <a:p xmlns:a="http://schemas.openxmlformats.org/drawingml/2006/main">
@@ -905,7 +905,7 @@
           <a:lstStyle xmlns:a="http://schemas.openxmlformats.org/drawingml/2006/main"/>
           <a:p xmlns:a="http://schemas.openxmlformats.org/drawingml/2006/main">
             <a:r>
-              <a:t>The rotating phase diagrams use illustrative standardized inputs [-1,0.3,0.8,1.4] and phase 2 theta for RZ applied to a superposition; they do not depict the full entangled ZZ state or measured probabilities. At pi/4, the ten-qubit training matrix is almost identity: rank 31, mean off-diagonal fidelity 0.000805. At pi/32 its entropy effective rank is 5.19 and similarity is 0.538897. Click pi/32 to demonstrate the measured matrix, then return to pi/4. This is a post-final input-only probe, not a new prediction comparison. Narrow angles can become poorly conditioned: the four-qubit narrowest map reaches 45.8 million. We have not selected a better predictive scale. Diagnostic chronology · Five measured scales</a:t>
+              <a:t>The rotating phase diagrams use illustrative standardized inputs [-1,0.3,0.8,1.4] and phase 2 theta for RZ applied to a superposition; they do not depict the full entangled ZZ state or measured probabilities. At pi/4, the ten-qubit training matrix is almost identity: rank 31, mean off-diagonal fidelity 0.000805. At pi/32 its entropy effective rank is 5.19 and similarity is 0.538897. Click pi/32 to demonstrate the measured matrix, then return to pi/4. This is a post-final input-only probe, not a new prediction comparison. Narrow angles can become poorly conditioned: the four-qubit narrowest map reaches 45.8 million. This scale diagnostic fitted no predictor and selected no replacement for the frozen final model. A later, separate training-only context pilot uses a fixed pi/32 recipe and a same-width zero control. Its exploratory estimates do not replace these final predictions. Diagnostic chronology · Five measured scales</a:t>
             </a:r>
           </a:p>
           <a:p xmlns:a="http://schemas.openxmlformats.org/drawingml/2006/main">
@@ -1268,7 +1268,7 @@
   </p:cSld>
   <p:clrMap bg1="lt1" tx1="dk1" bg2="lt2" tx2="dk2" accent1="accent1" accent2="accent2" accent3="accent3" accent4="accent4" accent5="accent5" accent6="accent6" hlink="hlink" folHlink="folHlink"/>
   <p:sldLayoutIdLst>
-    <p:sldLayoutId xmlns:r="http://schemas.openxmlformats.org/officeDocument/2006/relationships" id="2147483649" r:id="Rd3b123e31b54490e"/>
+    <p:sldLayoutId xmlns:r="http://schemas.openxmlformats.org/officeDocument/2006/relationships" id="2147483649" r:id="Rf815c99ebf8c4a46"/>
   </p:sldLayoutIdLst>
   <p:txStyles>
     <p:titleStyle>
@@ -2858,7 +2858,7 @@
           <p:nvPr/>
         </p:nvPicPr>
         <p:blipFill>
-          <a:blip xmlns:r="http://schemas.openxmlformats.org/officeDocument/2006/relationships" xmlns:a="http://schemas.openxmlformats.org/drawingml/2006/main" r:embed="R70b59de2dd144927"/>
+          <a:blip xmlns:r="http://schemas.openxmlformats.org/officeDocument/2006/relationships" xmlns:a="http://schemas.openxmlformats.org/drawingml/2006/main" r:embed="Rff362c0342f647a9"/>
           <a:stretch xmlns:a="http://schemas.openxmlformats.org/drawingml/2006/main"/>
         </p:blipFill>
         <p:spPr>
@@ -2876,7 +2876,7 @@
           <p:cNvPr id="2" name="">
             <a:extLst xmlns:a="http://schemas.openxmlformats.org/drawingml/2006/main">
               <a:ext uri="{FF2B5EF4-FFF2-40B4-BE49-F238E27FC236}">
-                <a16:creationId xmlns:a16="http://schemas.microsoft.com/office/drawing/2014/main" id="{3D6405F4-C5CB-44E1-9742-75E29BD0EACB}"/>
+                <a16:creationId xmlns:a16="http://schemas.microsoft.com/office/drawing/2014/main" id="{670A1714-3578-4584-BBD6-DCF8545280A5}"/>
               </a:ext>
             </a:extLst>
           </p:cNvPr>
@@ -2933,7 +2933,7 @@
           <p:cNvPr id="3" name="">
             <a:extLst xmlns:a="http://schemas.openxmlformats.org/drawingml/2006/main">
               <a:ext uri="{FF2B5EF4-FFF2-40B4-BE49-F238E27FC236}">
-                <a16:creationId xmlns:a16="http://schemas.microsoft.com/office/drawing/2014/main" id="{1392354E-2F29-4F12-B5DB-8022E717512D}"/>
+                <a16:creationId xmlns:a16="http://schemas.microsoft.com/office/drawing/2014/main" id="{E2836B3D-7FE4-45F4-A221-B3F91A973DCF}"/>
               </a:ext>
             </a:extLst>
           </p:cNvPr>
@@ -3013,7 +3013,7 @@
           <p:cNvPr id="4" name="">
             <a:extLst xmlns:a="http://schemas.openxmlformats.org/drawingml/2006/main">
               <a:ext uri="{FF2B5EF4-FFF2-40B4-BE49-F238E27FC236}">
-                <a16:creationId xmlns:a16="http://schemas.microsoft.com/office/drawing/2014/main" id="{055C021F-3D72-4936-8035-D955EDFF2A18}"/>
+                <a16:creationId xmlns:a16="http://schemas.microsoft.com/office/drawing/2014/main" id="{E1B18CD1-1268-4ED5-A229-3E9686810924}"/>
               </a:ext>
             </a:extLst>
           </p:cNvPr>
@@ -3093,7 +3093,7 @@
           <p:cNvPr id="5" name="">
             <a:extLst xmlns:a="http://schemas.openxmlformats.org/drawingml/2006/main">
               <a:ext uri="{FF2B5EF4-FFF2-40B4-BE49-F238E27FC236}">
-                <a16:creationId xmlns:a16="http://schemas.microsoft.com/office/drawing/2014/main" id="{D6F5BB24-3457-439E-B81A-B320D2AB2236}"/>
+                <a16:creationId xmlns:a16="http://schemas.microsoft.com/office/drawing/2014/main" id="{3C10E7DD-79C9-4172-9676-580C2050A10B}"/>
               </a:ext>
             </a:extLst>
           </p:cNvPr>
@@ -3150,7 +3150,7 @@
           <p:cNvPr id="6" name="">
             <a:extLst xmlns:a="http://schemas.openxmlformats.org/drawingml/2006/main">
               <a:ext uri="{FF2B5EF4-FFF2-40B4-BE49-F238E27FC236}">
-                <a16:creationId xmlns:a16="http://schemas.microsoft.com/office/drawing/2014/main" id="{AC3FC6AB-D091-4314-B858-1F2B2CB49AB7}"/>
+                <a16:creationId xmlns:a16="http://schemas.microsoft.com/office/drawing/2014/main" id="{B443AFE2-90E1-4FD3-A71A-1ED2E86B3260}"/>
               </a:ext>
             </a:extLst>
           </p:cNvPr>
@@ -3230,7 +3230,7 @@
           <p:cNvPr id="7" name="">
             <a:extLst xmlns:a="http://schemas.openxmlformats.org/drawingml/2006/main">
               <a:ext uri="{FF2B5EF4-FFF2-40B4-BE49-F238E27FC236}">
-                <a16:creationId xmlns:a16="http://schemas.microsoft.com/office/drawing/2014/main" id="{7DD06ACE-2DA6-4BDB-B118-93B3B32A892A}"/>
+                <a16:creationId xmlns:a16="http://schemas.microsoft.com/office/drawing/2014/main" id="{368CF175-B27B-4A4C-87EE-71FA973934EC}"/>
               </a:ext>
             </a:extLst>
           </p:cNvPr>
@@ -3285,7 +3285,7 @@
     </p:spTree>
     <p:extLst>
       <p:ext uri="{BB962C8B-B14F-4D97-AF65-F5344CB8AC3E}">
-        <p14:creationId xmlns:p14="http://schemas.microsoft.com/office/powerpoint/2010/main" val="1064287272"/>
+        <p14:creationId xmlns:p14="http://schemas.microsoft.com/office/powerpoint/2010/main" val="1948803795"/>
       </p:ext>
     </p:extLst>
   </p:cSld>
@@ -3316,7 +3316,7 @@
           <p:cNvPr id="13" name="">
             <a:extLst xmlns:a="http://schemas.openxmlformats.org/drawingml/2006/main">
               <a:ext uri="{FF2B5EF4-FFF2-40B4-BE49-F238E27FC236}">
-                <a16:creationId xmlns:a16="http://schemas.microsoft.com/office/drawing/2014/main" id="{AC3D6DC5-CD3E-4433-B462-394E103A100C}"/>
+                <a16:creationId xmlns:a16="http://schemas.microsoft.com/office/drawing/2014/main" id="{E2A1607F-B93A-4295-A052-89F23E6633A7}"/>
               </a:ext>
             </a:extLst>
           </p:cNvPr>
@@ -3377,7 +3377,7 @@
           <p:nvPr/>
         </p:nvPicPr>
         <p:blipFill>
-          <a:blip xmlns:r="http://schemas.openxmlformats.org/officeDocument/2006/relationships" xmlns:a="http://schemas.openxmlformats.org/drawingml/2006/main" r:embed="R20c7619bda864b61"/>
+          <a:blip xmlns:r="http://schemas.openxmlformats.org/officeDocument/2006/relationships" xmlns:a="http://schemas.openxmlformats.org/drawingml/2006/main" r:embed="R4aae339e553c400a"/>
           <a:stretch xmlns:a="http://schemas.openxmlformats.org/drawingml/2006/main"/>
         </p:blipFill>
         <p:spPr>
@@ -3395,7 +3395,7 @@
           <p:cNvPr id="3" name="">
             <a:extLst xmlns:a="http://schemas.openxmlformats.org/drawingml/2006/main">
               <a:ext uri="{FF2B5EF4-FFF2-40B4-BE49-F238E27FC236}">
-                <a16:creationId xmlns:a16="http://schemas.microsoft.com/office/drawing/2014/main" id="{B42E7CA2-CD29-4C62-B305-F3D8EC2A2BBC}"/>
+                <a16:creationId xmlns:a16="http://schemas.microsoft.com/office/drawing/2014/main" id="{73E5AA1E-4BF0-4935-A7A9-357A0D037679}"/>
               </a:ext>
             </a:extLst>
           </p:cNvPr>
@@ -3452,7 +3452,7 @@
           <p:cNvPr id="4" name="">
             <a:extLst xmlns:a="http://schemas.openxmlformats.org/drawingml/2006/main">
               <a:ext uri="{FF2B5EF4-FFF2-40B4-BE49-F238E27FC236}">
-                <a16:creationId xmlns:a16="http://schemas.microsoft.com/office/drawing/2014/main" id="{6A2C4CF4-98F9-422A-96F3-AB0440FBBAA8}"/>
+                <a16:creationId xmlns:a16="http://schemas.microsoft.com/office/drawing/2014/main" id="{2E021E6C-274F-44CC-AAFC-8721A30E55EE}"/>
               </a:ext>
             </a:extLst>
           </p:cNvPr>
@@ -3509,7 +3509,7 @@
           <p:cNvPr id="5" name="">
             <a:extLst xmlns:a="http://schemas.openxmlformats.org/drawingml/2006/main">
               <a:ext uri="{FF2B5EF4-FFF2-40B4-BE49-F238E27FC236}">
-                <a16:creationId xmlns:a16="http://schemas.microsoft.com/office/drawing/2014/main" id="{25FE47CF-85F8-4621-B2D1-058789455B31}"/>
+                <a16:creationId xmlns:a16="http://schemas.microsoft.com/office/drawing/2014/main" id="{FB3116EF-8555-428D-96A7-54CF4AF67589}"/>
               </a:ext>
             </a:extLst>
           </p:cNvPr>
@@ -3566,7 +3566,7 @@
           <p:cNvPr id="6" name="">
             <a:extLst xmlns:a="http://schemas.openxmlformats.org/drawingml/2006/main">
               <a:ext uri="{FF2B5EF4-FFF2-40B4-BE49-F238E27FC236}">
-                <a16:creationId xmlns:a16="http://schemas.microsoft.com/office/drawing/2014/main" id="{68AAFABF-7A3D-48A9-BDC8-C7BABA35550D}"/>
+                <a16:creationId xmlns:a16="http://schemas.microsoft.com/office/drawing/2014/main" id="{21BCDDA7-0236-4B9D-A71A-DBCC7D3B3CFE}"/>
               </a:ext>
             </a:extLst>
           </p:cNvPr>
@@ -3623,7 +3623,7 @@
           <p:cNvPr id="7" name="">
             <a:extLst xmlns:a="http://schemas.openxmlformats.org/drawingml/2006/main">
               <a:ext uri="{FF2B5EF4-FFF2-40B4-BE49-F238E27FC236}">
-                <a16:creationId xmlns:a16="http://schemas.microsoft.com/office/drawing/2014/main" id="{7E04C4B9-0BE2-477E-8615-C4A95C5C6C7E}"/>
+                <a16:creationId xmlns:a16="http://schemas.microsoft.com/office/drawing/2014/main" id="{A70FFD10-B6A4-4473-95AC-D6B63DC79778}"/>
               </a:ext>
             </a:extLst>
           </p:cNvPr>
@@ -3680,7 +3680,7 @@
           <p:cNvPr id="8" name="">
             <a:extLst xmlns:a="http://schemas.openxmlformats.org/drawingml/2006/main">
               <a:ext uri="{FF2B5EF4-FFF2-40B4-BE49-F238E27FC236}">
-                <a16:creationId xmlns:a16="http://schemas.microsoft.com/office/drawing/2014/main" id="{C1085814-511D-488E-93B6-63B0C9E7ED6A}"/>
+                <a16:creationId xmlns:a16="http://schemas.microsoft.com/office/drawing/2014/main" id="{B214FE86-A778-4B2A-A134-54112B5A227F}"/>
               </a:ext>
             </a:extLst>
           </p:cNvPr>
@@ -3737,7 +3737,7 @@
           <p:cNvPr id="9" name="">
             <a:extLst xmlns:a="http://schemas.openxmlformats.org/drawingml/2006/main">
               <a:ext uri="{FF2B5EF4-FFF2-40B4-BE49-F238E27FC236}">
-                <a16:creationId xmlns:a16="http://schemas.microsoft.com/office/drawing/2014/main" id="{CD9F85BC-1708-4F36-891F-5548069DE0B2}"/>
+                <a16:creationId xmlns:a16="http://schemas.microsoft.com/office/drawing/2014/main" id="{D56E8E34-A538-48A4-B7E6-ECCD2C4C0DBC}"/>
               </a:ext>
             </a:extLst>
           </p:cNvPr>
@@ -3794,7 +3794,7 @@
           <p:cNvPr id="10" name="">
             <a:extLst xmlns:a="http://schemas.openxmlformats.org/drawingml/2006/main">
               <a:ext uri="{FF2B5EF4-FFF2-40B4-BE49-F238E27FC236}">
-                <a16:creationId xmlns:a16="http://schemas.microsoft.com/office/drawing/2014/main" id="{0AAC1FA3-691A-4099-A3E1-8EA5B751C07E}"/>
+                <a16:creationId xmlns:a16="http://schemas.microsoft.com/office/drawing/2014/main" id="{CB1BDC57-FE0A-4C0B-88F4-98A7D3030324}"/>
               </a:ext>
             </a:extLst>
           </p:cNvPr>
@@ -3851,7 +3851,7 @@
           <p:cNvPr id="11" name="">
             <a:extLst xmlns:a="http://schemas.openxmlformats.org/drawingml/2006/main">
               <a:ext uri="{FF2B5EF4-FFF2-40B4-BE49-F238E27FC236}">
-                <a16:creationId xmlns:a16="http://schemas.microsoft.com/office/drawing/2014/main" id="{46CA9100-C02D-4FA0-8D0F-A7028AACD320}"/>
+                <a16:creationId xmlns:a16="http://schemas.microsoft.com/office/drawing/2014/main" id="{90FF5E2F-9E0F-4462-9D82-5EDFA817DD8B}"/>
               </a:ext>
             </a:extLst>
           </p:cNvPr>
@@ -3908,7 +3908,7 @@
           <p:cNvPr id="12" name="">
             <a:extLst xmlns:a="http://schemas.openxmlformats.org/drawingml/2006/main">
               <a:ext uri="{FF2B5EF4-FFF2-40B4-BE49-F238E27FC236}">
-                <a16:creationId xmlns:a16="http://schemas.microsoft.com/office/drawing/2014/main" id="{57847D02-52A2-47EB-B9C5-9244FF9934E5}"/>
+                <a16:creationId xmlns:a16="http://schemas.microsoft.com/office/drawing/2014/main" id="{CE1C771E-38FB-4E44-9F46-E516A77C97CC}"/>
               </a:ext>
             </a:extLst>
           </p:cNvPr>
@@ -3963,7 +3963,7 @@
     </p:spTree>
     <p:extLst>
       <p:ext uri="{BB962C8B-B14F-4D97-AF65-F5344CB8AC3E}">
-        <p14:creationId xmlns:p14="http://schemas.microsoft.com/office/powerpoint/2010/main" val="1419235606"/>
+        <p14:creationId xmlns:p14="http://schemas.microsoft.com/office/powerpoint/2010/main" val="149527247"/>
       </p:ext>
     </p:extLst>
   </p:cSld>
@@ -3994,7 +3994,7 @@
           <p:cNvPr id="27" name="">
             <a:extLst xmlns:a="http://schemas.openxmlformats.org/drawingml/2006/main">
               <a:ext uri="{FF2B5EF4-FFF2-40B4-BE49-F238E27FC236}">
-                <a16:creationId xmlns:a16="http://schemas.microsoft.com/office/drawing/2014/main" id="{933E2A76-0C24-46C9-BBB4-9FD3F520ABD9}"/>
+                <a16:creationId xmlns:a16="http://schemas.microsoft.com/office/drawing/2014/main" id="{9E230F2C-339B-4089-A475-7EFA388DA118}"/>
               </a:ext>
             </a:extLst>
           </p:cNvPr>
@@ -4051,7 +4051,7 @@
           <p:cNvPr id="2" name="">
             <a:extLst xmlns:a="http://schemas.openxmlformats.org/drawingml/2006/main">
               <a:ext uri="{FF2B5EF4-FFF2-40B4-BE49-F238E27FC236}">
-                <a16:creationId xmlns:a16="http://schemas.microsoft.com/office/drawing/2014/main" id="{09C3C511-822A-4580-BBD0-5DD5E26DE71E}"/>
+                <a16:creationId xmlns:a16="http://schemas.microsoft.com/office/drawing/2014/main" id="{3EB6A97E-4B51-4C10-A935-8725545DCE36}"/>
               </a:ext>
             </a:extLst>
           </p:cNvPr>
@@ -4108,7 +4108,7 @@
           <p:cNvPr id="3" name="">
             <a:extLst xmlns:a="http://schemas.openxmlformats.org/drawingml/2006/main">
               <a:ext uri="{FF2B5EF4-FFF2-40B4-BE49-F238E27FC236}">
-                <a16:creationId xmlns:a16="http://schemas.microsoft.com/office/drawing/2014/main" id="{CD6FA71E-836C-40EC-88AD-BFC09AD54D28}"/>
+                <a16:creationId xmlns:a16="http://schemas.microsoft.com/office/drawing/2014/main" id="{B9B499B9-1FA6-4324-9CC4-F3C1C231E312}"/>
               </a:ext>
             </a:extLst>
           </p:cNvPr>
@@ -4140,7 +4140,7 @@
           <p:cNvPr id="4" name="">
             <a:extLst xmlns:a="http://schemas.openxmlformats.org/drawingml/2006/main">
               <a:ext uri="{FF2B5EF4-FFF2-40B4-BE49-F238E27FC236}">
-                <a16:creationId xmlns:a16="http://schemas.microsoft.com/office/drawing/2014/main" id="{5D6A24D9-DD60-462A-9490-086BC42BA926}"/>
+                <a16:creationId xmlns:a16="http://schemas.microsoft.com/office/drawing/2014/main" id="{EF9C3DC7-A558-446A-8A60-CD15840F1111}"/>
               </a:ext>
             </a:extLst>
           </p:cNvPr>
@@ -4197,7 +4197,7 @@
           <p:cNvPr id="5" name="">
             <a:extLst xmlns:a="http://schemas.openxmlformats.org/drawingml/2006/main">
               <a:ext uri="{FF2B5EF4-FFF2-40B4-BE49-F238E27FC236}">
-                <a16:creationId xmlns:a16="http://schemas.microsoft.com/office/drawing/2014/main" id="{5D469E78-0499-4520-83EB-20BFB528DD58}"/>
+                <a16:creationId xmlns:a16="http://schemas.microsoft.com/office/drawing/2014/main" id="{CA22BFB6-302B-498B-8555-0056353AD2ED}"/>
               </a:ext>
             </a:extLst>
           </p:cNvPr>
@@ -4227,7 +4227,7 @@
           <p:cNvPr id="6" name="">
             <a:extLst xmlns:a="http://schemas.openxmlformats.org/drawingml/2006/main">
               <a:ext uri="{FF2B5EF4-FFF2-40B4-BE49-F238E27FC236}">
-                <a16:creationId xmlns:a16="http://schemas.microsoft.com/office/drawing/2014/main" id="{01EB18E0-C774-4797-BA27-FC51AF80557D}"/>
+                <a16:creationId xmlns:a16="http://schemas.microsoft.com/office/drawing/2014/main" id="{472041C5-D12D-424F-9814-BA08D7EDE165}"/>
               </a:ext>
             </a:extLst>
           </p:cNvPr>
@@ -4284,7 +4284,7 @@
           <p:cNvPr id="7" name="">
             <a:extLst xmlns:a="http://schemas.openxmlformats.org/drawingml/2006/main">
               <a:ext uri="{FF2B5EF4-FFF2-40B4-BE49-F238E27FC236}">
-                <a16:creationId xmlns:a16="http://schemas.microsoft.com/office/drawing/2014/main" id="{AA2755D5-156A-48A2-AE6A-0CCABE9EC4C5}"/>
+                <a16:creationId xmlns:a16="http://schemas.microsoft.com/office/drawing/2014/main" id="{7F22E74B-92FE-4778-B4F9-DC8415A3988C}"/>
               </a:ext>
             </a:extLst>
           </p:cNvPr>
@@ -4316,7 +4316,7 @@
           <p:cNvPr id="8" name="">
             <a:extLst xmlns:a="http://schemas.openxmlformats.org/drawingml/2006/main">
               <a:ext uri="{FF2B5EF4-FFF2-40B4-BE49-F238E27FC236}">
-                <a16:creationId xmlns:a16="http://schemas.microsoft.com/office/drawing/2014/main" id="{4D8476FF-CD1E-46F7-B05F-00551746E9F3}"/>
+                <a16:creationId xmlns:a16="http://schemas.microsoft.com/office/drawing/2014/main" id="{2FF2158A-8809-499F-9C80-7610862E059B}"/>
               </a:ext>
             </a:extLst>
           </p:cNvPr>
@@ -4373,7 +4373,7 @@
           <p:cNvPr id="9" name="">
             <a:extLst xmlns:a="http://schemas.openxmlformats.org/drawingml/2006/main">
               <a:ext uri="{FF2B5EF4-FFF2-40B4-BE49-F238E27FC236}">
-                <a16:creationId xmlns:a16="http://schemas.microsoft.com/office/drawing/2014/main" id="{3E5E33C2-0687-4157-83CE-CF134CE3981D}"/>
+                <a16:creationId xmlns:a16="http://schemas.microsoft.com/office/drawing/2014/main" id="{01ABED6A-343B-4CFA-A146-72412E9D2335}"/>
               </a:ext>
             </a:extLst>
           </p:cNvPr>
@@ -4403,7 +4403,7 @@
           <p:cNvPr id="10" name="">
             <a:extLst xmlns:a="http://schemas.openxmlformats.org/drawingml/2006/main">
               <a:ext uri="{FF2B5EF4-FFF2-40B4-BE49-F238E27FC236}">
-                <a16:creationId xmlns:a16="http://schemas.microsoft.com/office/drawing/2014/main" id="{77FA93D7-BD32-45EC-9E15-882BF85B797B}"/>
+                <a16:creationId xmlns:a16="http://schemas.microsoft.com/office/drawing/2014/main" id="{F00698B8-81C2-4074-BA81-9B046324693B}"/>
               </a:ext>
             </a:extLst>
           </p:cNvPr>
@@ -4460,7 +4460,7 @@
           <p:cNvPr id="11" name="">
             <a:extLst xmlns:a="http://schemas.openxmlformats.org/drawingml/2006/main">
               <a:ext uri="{FF2B5EF4-FFF2-40B4-BE49-F238E27FC236}">
-                <a16:creationId xmlns:a16="http://schemas.microsoft.com/office/drawing/2014/main" id="{EF45C21E-E240-4DF1-AA8F-6B3FE8B79326}"/>
+                <a16:creationId xmlns:a16="http://schemas.microsoft.com/office/drawing/2014/main" id="{ED486E5B-2BEB-48E0-875B-A5E38691C3DE}"/>
               </a:ext>
             </a:extLst>
           </p:cNvPr>
@@ -4490,7 +4490,7 @@
           <p:cNvPr id="12" name="">
             <a:extLst xmlns:a="http://schemas.openxmlformats.org/drawingml/2006/main">
               <a:ext uri="{FF2B5EF4-FFF2-40B4-BE49-F238E27FC236}">
-                <a16:creationId xmlns:a16="http://schemas.microsoft.com/office/drawing/2014/main" id="{C0A7DB20-2AEF-4EC1-B59E-B6C19E7A8857}"/>
+                <a16:creationId xmlns:a16="http://schemas.microsoft.com/office/drawing/2014/main" id="{F6FB3E64-310F-4E1C-B897-FCA7EC359F2A}"/>
               </a:ext>
             </a:extLst>
           </p:cNvPr>
@@ -4547,7 +4547,7 @@
           <p:cNvPr id="13" name="">
             <a:extLst xmlns:a="http://schemas.openxmlformats.org/drawingml/2006/main">
               <a:ext uri="{FF2B5EF4-FFF2-40B4-BE49-F238E27FC236}">
-                <a16:creationId xmlns:a16="http://schemas.microsoft.com/office/drawing/2014/main" id="{3CD12D04-CC9E-4346-9FAC-48FDD606335D}"/>
+                <a16:creationId xmlns:a16="http://schemas.microsoft.com/office/drawing/2014/main" id="{D901447F-DB3E-4DA7-B00F-5ED2B4211882}"/>
               </a:ext>
             </a:extLst>
           </p:cNvPr>
@@ -4579,7 +4579,7 @@
           <p:cNvPr id="14" name="">
             <a:extLst xmlns:a="http://schemas.openxmlformats.org/drawingml/2006/main">
               <a:ext uri="{FF2B5EF4-FFF2-40B4-BE49-F238E27FC236}">
-                <a16:creationId xmlns:a16="http://schemas.microsoft.com/office/drawing/2014/main" id="{0CC5EF88-57E7-4885-BE01-C104D0DA4B3F}"/>
+                <a16:creationId xmlns:a16="http://schemas.microsoft.com/office/drawing/2014/main" id="{A45A9457-EBD6-41B1-A500-672760FB0CC9}"/>
               </a:ext>
             </a:extLst>
           </p:cNvPr>
@@ -4636,7 +4636,7 @@
           <p:cNvPr id="15" name="">
             <a:extLst xmlns:a="http://schemas.openxmlformats.org/drawingml/2006/main">
               <a:ext uri="{FF2B5EF4-FFF2-40B4-BE49-F238E27FC236}">
-                <a16:creationId xmlns:a16="http://schemas.microsoft.com/office/drawing/2014/main" id="{233CBD1D-300A-4294-B25C-B4DCD6FDAF94}"/>
+                <a16:creationId xmlns:a16="http://schemas.microsoft.com/office/drawing/2014/main" id="{2DBA23F7-A7F3-4F4A-9428-92A9DF91D3C8}"/>
               </a:ext>
             </a:extLst>
           </p:cNvPr>
@@ -4666,7 +4666,7 @@
           <p:cNvPr id="16" name="">
             <a:extLst xmlns:a="http://schemas.openxmlformats.org/drawingml/2006/main">
               <a:ext uri="{FF2B5EF4-FFF2-40B4-BE49-F238E27FC236}">
-                <a16:creationId xmlns:a16="http://schemas.microsoft.com/office/drawing/2014/main" id="{4393858A-1E3F-4F18-A643-E7842A0C13A3}"/>
+                <a16:creationId xmlns:a16="http://schemas.microsoft.com/office/drawing/2014/main" id="{B62A66FA-0AC6-4A8E-BD5F-3B02D2EECBD8}"/>
               </a:ext>
             </a:extLst>
           </p:cNvPr>
@@ -4723,7 +4723,7 @@
           <p:cNvPr id="17" name="">
             <a:extLst xmlns:a="http://schemas.openxmlformats.org/drawingml/2006/main">
               <a:ext uri="{FF2B5EF4-FFF2-40B4-BE49-F238E27FC236}">
-                <a16:creationId xmlns:a16="http://schemas.microsoft.com/office/drawing/2014/main" id="{43936C8F-83DE-4E4C-BCB2-BFDF8D9747F5}"/>
+                <a16:creationId xmlns:a16="http://schemas.microsoft.com/office/drawing/2014/main" id="{EF2F20A7-35DA-4F11-8EA8-DD3BFA67487E}"/>
               </a:ext>
             </a:extLst>
           </p:cNvPr>
@@ -4755,7 +4755,7 @@
           <p:cNvPr id="18" name="">
             <a:extLst xmlns:a="http://schemas.openxmlformats.org/drawingml/2006/main">
               <a:ext uri="{FF2B5EF4-FFF2-40B4-BE49-F238E27FC236}">
-                <a16:creationId xmlns:a16="http://schemas.microsoft.com/office/drawing/2014/main" id="{E8A620C7-524F-47FD-A095-A47ED7F44480}"/>
+                <a16:creationId xmlns:a16="http://schemas.microsoft.com/office/drawing/2014/main" id="{9D4E9572-D808-49C9-BB09-B32B9C055805}"/>
               </a:ext>
             </a:extLst>
           </p:cNvPr>
@@ -4812,7 +4812,7 @@
           <p:cNvPr id="19" name="">
             <a:extLst xmlns:a="http://schemas.openxmlformats.org/drawingml/2006/main">
               <a:ext uri="{FF2B5EF4-FFF2-40B4-BE49-F238E27FC236}">
-                <a16:creationId xmlns:a16="http://schemas.microsoft.com/office/drawing/2014/main" id="{ADD872B7-59C3-4AF6-AD46-B0770329B6C8}"/>
+                <a16:creationId xmlns:a16="http://schemas.microsoft.com/office/drawing/2014/main" id="{9BA0B374-3EDF-4F68-A0C7-4EC8FBAE5014}"/>
               </a:ext>
             </a:extLst>
           </p:cNvPr>
@@ -4842,7 +4842,7 @@
           <p:cNvPr id="20" name="">
             <a:extLst xmlns:a="http://schemas.openxmlformats.org/drawingml/2006/main">
               <a:ext uri="{FF2B5EF4-FFF2-40B4-BE49-F238E27FC236}">
-                <a16:creationId xmlns:a16="http://schemas.microsoft.com/office/drawing/2014/main" id="{C9230DDE-9497-492C-9D45-435B0FE223FC}"/>
+                <a16:creationId xmlns:a16="http://schemas.microsoft.com/office/drawing/2014/main" id="{0CAE863D-F079-4673-B417-738EC4E86C6D}"/>
               </a:ext>
             </a:extLst>
           </p:cNvPr>
@@ -4899,7 +4899,7 @@
           <p:cNvPr id="21" name="">
             <a:extLst xmlns:a="http://schemas.openxmlformats.org/drawingml/2006/main">
               <a:ext uri="{FF2B5EF4-FFF2-40B4-BE49-F238E27FC236}">
-                <a16:creationId xmlns:a16="http://schemas.microsoft.com/office/drawing/2014/main" id="{18100736-D4DF-416B-A073-F0D803607E3E}"/>
+                <a16:creationId xmlns:a16="http://schemas.microsoft.com/office/drawing/2014/main" id="{AD7F0E2A-477F-4A35-8AC9-7669F5CA2D4D}"/>
               </a:ext>
             </a:extLst>
           </p:cNvPr>
@@ -4929,7 +4929,7 @@
           <p:cNvPr id="22" name="">
             <a:extLst xmlns:a="http://schemas.openxmlformats.org/drawingml/2006/main">
               <a:ext uri="{FF2B5EF4-FFF2-40B4-BE49-F238E27FC236}">
-                <a16:creationId xmlns:a16="http://schemas.microsoft.com/office/drawing/2014/main" id="{763A05F9-737E-46EC-806F-962D248744DA}"/>
+                <a16:creationId xmlns:a16="http://schemas.microsoft.com/office/drawing/2014/main" id="{F7656C1A-6D50-4C83-94D5-8EEB383BBB27}"/>
               </a:ext>
             </a:extLst>
           </p:cNvPr>
@@ -4986,7 +4986,7 @@
           <p:cNvPr id="23" name="">
             <a:extLst xmlns:a="http://schemas.openxmlformats.org/drawingml/2006/main">
               <a:ext uri="{FF2B5EF4-FFF2-40B4-BE49-F238E27FC236}">
-                <a16:creationId xmlns:a16="http://schemas.microsoft.com/office/drawing/2014/main" id="{DA0DA9BC-C4B0-429E-85E1-215BB5ECD98C}"/>
+                <a16:creationId xmlns:a16="http://schemas.microsoft.com/office/drawing/2014/main" id="{3EB2BF45-0384-4D92-8421-BA7DE693980F}"/>
               </a:ext>
             </a:extLst>
           </p:cNvPr>
@@ -5066,7 +5066,7 @@
           <p:cNvPr id="24" name="">
             <a:extLst xmlns:a="http://schemas.openxmlformats.org/drawingml/2006/main">
               <a:ext uri="{FF2B5EF4-FFF2-40B4-BE49-F238E27FC236}">
-                <a16:creationId xmlns:a16="http://schemas.microsoft.com/office/drawing/2014/main" id="{F455A2ED-D542-4733-95FC-AC83339522EB}"/>
+                <a16:creationId xmlns:a16="http://schemas.microsoft.com/office/drawing/2014/main" id="{A4932D21-1901-4C21-B3F1-B873D455A53D}"/>
               </a:ext>
             </a:extLst>
           </p:cNvPr>
@@ -5153,7 +5153,7 @@
         </p:xfrm>
         <a:graphic xmlns:a="http://schemas.openxmlformats.org/drawingml/2006/main">
           <a:graphicData uri="http://schemas.openxmlformats.org/drawingml/2006/chart">
-            <c:chart xmlns:r="http://schemas.openxmlformats.org/officeDocument/2006/relationships" xmlns:c="http://schemas.openxmlformats.org/drawingml/2006/chart" r:id="R551bbe938b864b66"/>
+            <c:chart xmlns:r="http://schemas.openxmlformats.org/officeDocument/2006/relationships" xmlns:c="http://schemas.openxmlformats.org/drawingml/2006/chart" r:id="Rf13a29585e55403c"/>
           </a:graphicData>
         </a:graphic>
       </p:graphicFrame>
@@ -5162,7 +5162,7 @@
           <p:cNvPr id="26" name="">
             <a:extLst xmlns:a="http://schemas.openxmlformats.org/drawingml/2006/main">
               <a:ext uri="{FF2B5EF4-FFF2-40B4-BE49-F238E27FC236}">
-                <a16:creationId xmlns:a16="http://schemas.microsoft.com/office/drawing/2014/main" id="{82307930-ADCC-418B-9A24-E7647576B47C}"/>
+                <a16:creationId xmlns:a16="http://schemas.microsoft.com/office/drawing/2014/main" id="{8C696657-CEC1-42D3-8A8E-FDE514BB806C}"/>
               </a:ext>
             </a:extLst>
           </p:cNvPr>
@@ -5240,7 +5240,7 @@
     </p:spTree>
     <p:extLst>
       <p:ext uri="{BB962C8B-B14F-4D97-AF65-F5344CB8AC3E}">
-        <p14:creationId xmlns:p14="http://schemas.microsoft.com/office/powerpoint/2010/main" val="513503978"/>
+        <p14:creationId xmlns:p14="http://schemas.microsoft.com/office/powerpoint/2010/main" val="968575370"/>
       </p:ext>
     </p:extLst>
   </p:cSld>
@@ -5271,7 +5271,7 @@
           <p:cNvPr id="5" name="">
             <a:extLst xmlns:a="http://schemas.openxmlformats.org/drawingml/2006/main">
               <a:ext uri="{FF2B5EF4-FFF2-40B4-BE49-F238E27FC236}">
-                <a16:creationId xmlns:a16="http://schemas.microsoft.com/office/drawing/2014/main" id="{80941064-35A9-4CC1-8F8F-08763C397227}"/>
+                <a16:creationId xmlns:a16="http://schemas.microsoft.com/office/drawing/2014/main" id="{781C7F0A-1EF9-4391-830B-A3305315AA21}"/>
               </a:ext>
             </a:extLst>
           </p:cNvPr>
@@ -5328,7 +5328,7 @@
           <p:cNvPr id="2" name="">
             <a:extLst xmlns:a="http://schemas.openxmlformats.org/drawingml/2006/main">
               <a:ext uri="{FF2B5EF4-FFF2-40B4-BE49-F238E27FC236}">
-                <a16:creationId xmlns:a16="http://schemas.microsoft.com/office/drawing/2014/main" id="{C592B028-2D0B-40BD-A034-B00835050DAB}"/>
+                <a16:creationId xmlns:a16="http://schemas.microsoft.com/office/drawing/2014/main" id="{6409C4CD-8072-4359-A0AD-B49FC5366D32}"/>
               </a:ext>
             </a:extLst>
           </p:cNvPr>
@@ -5392,7 +5392,7 @@
         </p:xfrm>
         <a:graphic xmlns:a="http://schemas.openxmlformats.org/drawingml/2006/main">
           <a:graphicData uri="http://schemas.openxmlformats.org/drawingml/2006/chart">
-            <c:chart xmlns:r="http://schemas.openxmlformats.org/officeDocument/2006/relationships" xmlns:c="http://schemas.openxmlformats.org/drawingml/2006/chart" r:id="R9e126d1e96c44e0b"/>
+            <c:chart xmlns:r="http://schemas.openxmlformats.org/officeDocument/2006/relationships" xmlns:c="http://schemas.openxmlformats.org/drawingml/2006/chart" r:id="R93c5ab79a07d482d"/>
           </a:graphicData>
         </a:graphic>
       </p:graphicFrame>
@@ -5401,7 +5401,7 @@
           <p:cNvPr id="4" name="">
             <a:extLst xmlns:a="http://schemas.openxmlformats.org/drawingml/2006/main">
               <a:ext uri="{FF2B5EF4-FFF2-40B4-BE49-F238E27FC236}">
-                <a16:creationId xmlns:a16="http://schemas.microsoft.com/office/drawing/2014/main" id="{634A8DAA-7B43-4053-B0BE-874244BE4E62}"/>
+                <a16:creationId xmlns:a16="http://schemas.microsoft.com/office/drawing/2014/main" id="{95BB426D-A1F7-4BE1-A547-0BDA88A69747}"/>
               </a:ext>
             </a:extLst>
           </p:cNvPr>
@@ -5479,7 +5479,7 @@
     </p:spTree>
     <p:extLst>
       <p:ext uri="{BB962C8B-B14F-4D97-AF65-F5344CB8AC3E}">
-        <p14:creationId xmlns:p14="http://schemas.microsoft.com/office/powerpoint/2010/main" val="1253074176"/>
+        <p14:creationId xmlns:p14="http://schemas.microsoft.com/office/powerpoint/2010/main" val="1940973956"/>
       </p:ext>
     </p:extLst>
   </p:cSld>
@@ -5510,7 +5510,7 @@
           <p:cNvPr id="6" name="">
             <a:extLst xmlns:a="http://schemas.openxmlformats.org/drawingml/2006/main">
               <a:ext uri="{FF2B5EF4-FFF2-40B4-BE49-F238E27FC236}">
-                <a16:creationId xmlns:a16="http://schemas.microsoft.com/office/drawing/2014/main" id="{2B27648B-FE3A-44C7-96DF-E6D9091AF9A4}"/>
+                <a16:creationId xmlns:a16="http://schemas.microsoft.com/office/drawing/2014/main" id="{A6DF749A-92D8-4DE1-AE45-5EF6C38BE77B}"/>
               </a:ext>
             </a:extLst>
           </p:cNvPr>
@@ -5567,7 +5567,7 @@
           <p:cNvPr id="2" name="">
             <a:extLst xmlns:a="http://schemas.openxmlformats.org/drawingml/2006/main">
               <a:ext uri="{FF2B5EF4-FFF2-40B4-BE49-F238E27FC236}">
-                <a16:creationId xmlns:a16="http://schemas.microsoft.com/office/drawing/2014/main" id="{2090C3BA-DE84-40AE-878E-84B81DCE2766}"/>
+                <a16:creationId xmlns:a16="http://schemas.microsoft.com/office/drawing/2014/main" id="{F219A73E-4B80-4B43-8A4F-BF340941714B}"/>
               </a:ext>
             </a:extLst>
           </p:cNvPr>
@@ -5624,7 +5624,7 @@
           <p:cNvPr id="3" name="">
             <a:extLst xmlns:a="http://schemas.openxmlformats.org/drawingml/2006/main">
               <a:ext uri="{FF2B5EF4-FFF2-40B4-BE49-F238E27FC236}">
-                <a16:creationId xmlns:a16="http://schemas.microsoft.com/office/drawing/2014/main" id="{7C172D1B-B2BA-4322-B443-57A8BBDDDF4A}"/>
+                <a16:creationId xmlns:a16="http://schemas.microsoft.com/office/drawing/2014/main" id="{8DC76666-D073-4699-B65E-01401FE8B1D1}"/>
               </a:ext>
             </a:extLst>
           </p:cNvPr>
@@ -5688,7 +5688,7 @@
         </p:xfrm>
         <a:graphic xmlns:a="http://schemas.openxmlformats.org/drawingml/2006/main">
           <a:graphicData uri="http://schemas.openxmlformats.org/drawingml/2006/chart">
-            <c:chart xmlns:r="http://schemas.openxmlformats.org/officeDocument/2006/relationships" xmlns:c="http://schemas.openxmlformats.org/drawingml/2006/chart" r:id="Rf0bef7a981c640bc"/>
+            <c:chart xmlns:r="http://schemas.openxmlformats.org/officeDocument/2006/relationships" xmlns:c="http://schemas.openxmlformats.org/drawingml/2006/chart" r:id="R2e885a0285264911"/>
           </a:graphicData>
         </a:graphic>
       </p:graphicFrame>
@@ -5697,7 +5697,7 @@
           <p:cNvPr id="5" name="">
             <a:extLst xmlns:a="http://schemas.openxmlformats.org/drawingml/2006/main">
               <a:ext uri="{FF2B5EF4-FFF2-40B4-BE49-F238E27FC236}">
-                <a16:creationId xmlns:a16="http://schemas.microsoft.com/office/drawing/2014/main" id="{5E78CE94-56DF-4714-835C-47DBB6AE9A60}"/>
+                <a16:creationId xmlns:a16="http://schemas.microsoft.com/office/drawing/2014/main" id="{51A7731E-ACBA-4644-A240-E9934A309221}"/>
               </a:ext>
             </a:extLst>
           </p:cNvPr>
@@ -5775,7 +5775,7 @@
     </p:spTree>
     <p:extLst>
       <p:ext uri="{BB962C8B-B14F-4D97-AF65-F5344CB8AC3E}">
-        <p14:creationId xmlns:p14="http://schemas.microsoft.com/office/powerpoint/2010/main" val="56189870"/>
+        <p14:creationId xmlns:p14="http://schemas.microsoft.com/office/powerpoint/2010/main" val="1352298548"/>
       </p:ext>
     </p:extLst>
   </p:cSld>
@@ -5806,7 +5806,7 @@
           <p:cNvPr id="29" name="">
             <a:extLst xmlns:a="http://schemas.openxmlformats.org/drawingml/2006/main">
               <a:ext uri="{FF2B5EF4-FFF2-40B4-BE49-F238E27FC236}">
-                <a16:creationId xmlns:a16="http://schemas.microsoft.com/office/drawing/2014/main" id="{0EC32626-3100-42EB-A01E-D3E3C54933E4}"/>
+                <a16:creationId xmlns:a16="http://schemas.microsoft.com/office/drawing/2014/main" id="{35C79245-D96D-4B8A-A495-4F3735B69814}"/>
               </a:ext>
             </a:extLst>
           </p:cNvPr>
@@ -5863,7 +5863,7 @@
           <p:cNvPr id="2" name="">
             <a:extLst xmlns:a="http://schemas.openxmlformats.org/drawingml/2006/main">
               <a:ext uri="{FF2B5EF4-FFF2-40B4-BE49-F238E27FC236}">
-                <a16:creationId xmlns:a16="http://schemas.microsoft.com/office/drawing/2014/main" id="{529C39CC-FD5D-4D9A-8596-D109692CDF70}"/>
+                <a16:creationId xmlns:a16="http://schemas.microsoft.com/office/drawing/2014/main" id="{CCDAC503-4B87-450B-A088-BAE1AC9000EA}"/>
               </a:ext>
             </a:extLst>
           </p:cNvPr>
@@ -5920,7 +5920,7 @@
           <p:cNvPr id="3" name="">
             <a:extLst xmlns:a="http://schemas.openxmlformats.org/drawingml/2006/main">
               <a:ext uri="{FF2B5EF4-FFF2-40B4-BE49-F238E27FC236}">
-                <a16:creationId xmlns:a16="http://schemas.microsoft.com/office/drawing/2014/main" id="{FBDE2D03-6283-46D8-B4A6-655F11F4C98F}"/>
+                <a16:creationId xmlns:a16="http://schemas.microsoft.com/office/drawing/2014/main" id="{C3174514-5C0B-42D5-A053-37235B0A3781}"/>
               </a:ext>
             </a:extLst>
           </p:cNvPr>
@@ -5950,7 +5950,7 @@
           <p:cNvPr id="4" name="">
             <a:extLst xmlns:a="http://schemas.openxmlformats.org/drawingml/2006/main">
               <a:ext uri="{FF2B5EF4-FFF2-40B4-BE49-F238E27FC236}">
-                <a16:creationId xmlns:a16="http://schemas.microsoft.com/office/drawing/2014/main" id="{8CB95EFB-24D1-4619-A646-D67C4F8DCEE9}"/>
+                <a16:creationId xmlns:a16="http://schemas.microsoft.com/office/drawing/2014/main" id="{D8598336-44C5-4F7D-A135-17A6519020DD}"/>
               </a:ext>
             </a:extLst>
           </p:cNvPr>
@@ -5980,7 +5980,7 @@
           <p:cNvPr id="5" name="">
             <a:extLst xmlns:a="http://schemas.openxmlformats.org/drawingml/2006/main">
               <a:ext uri="{FF2B5EF4-FFF2-40B4-BE49-F238E27FC236}">
-                <a16:creationId xmlns:a16="http://schemas.microsoft.com/office/drawing/2014/main" id="{1C91757E-7149-4FBC-9A31-C778257CBC60}"/>
+                <a16:creationId xmlns:a16="http://schemas.microsoft.com/office/drawing/2014/main" id="{0A73C52E-9DC4-4175-BEEC-BF84A9FC6D60}"/>
               </a:ext>
             </a:extLst>
           </p:cNvPr>
@@ -6010,7 +6010,7 @@
           <p:cNvPr id="6" name="">
             <a:extLst xmlns:a="http://schemas.openxmlformats.org/drawingml/2006/main">
               <a:ext uri="{FF2B5EF4-FFF2-40B4-BE49-F238E27FC236}">
-                <a16:creationId xmlns:a16="http://schemas.microsoft.com/office/drawing/2014/main" id="{D68F2DBE-A615-4EE2-A65F-B9B3D24056A6}"/>
+                <a16:creationId xmlns:a16="http://schemas.microsoft.com/office/drawing/2014/main" id="{93436532-CE99-4764-BA06-64040CD54FEE}"/>
               </a:ext>
             </a:extLst>
           </p:cNvPr>
@@ -6042,7 +6042,7 @@
           <p:cNvPr id="7" name="">
             <a:extLst xmlns:a="http://schemas.openxmlformats.org/drawingml/2006/main">
               <a:ext uri="{FF2B5EF4-FFF2-40B4-BE49-F238E27FC236}">
-                <a16:creationId xmlns:a16="http://schemas.microsoft.com/office/drawing/2014/main" id="{A5D5EB48-5C36-4335-9F38-6ABD8DEBB4C1}"/>
+                <a16:creationId xmlns:a16="http://schemas.microsoft.com/office/drawing/2014/main" id="{D1803DA3-1DC1-48E4-8BC2-D5416CE9D991}"/>
               </a:ext>
             </a:extLst>
           </p:cNvPr>
@@ -6099,7 +6099,7 @@
           <p:cNvPr id="8" name="">
             <a:extLst xmlns:a="http://schemas.openxmlformats.org/drawingml/2006/main">
               <a:ext uri="{FF2B5EF4-FFF2-40B4-BE49-F238E27FC236}">
-                <a16:creationId xmlns:a16="http://schemas.microsoft.com/office/drawing/2014/main" id="{E5246A07-BFCC-437A-97B7-9F4A8588E1D1}"/>
+                <a16:creationId xmlns:a16="http://schemas.microsoft.com/office/drawing/2014/main" id="{D1401C94-85D4-485A-B019-8A7664A98D5B}"/>
               </a:ext>
             </a:extLst>
           </p:cNvPr>
@@ -6129,7 +6129,7 @@
           <p:cNvPr id="9" name="">
             <a:extLst xmlns:a="http://schemas.openxmlformats.org/drawingml/2006/main">
               <a:ext uri="{FF2B5EF4-FFF2-40B4-BE49-F238E27FC236}">
-                <a16:creationId xmlns:a16="http://schemas.microsoft.com/office/drawing/2014/main" id="{39AC1F17-F4E3-462B-8A36-23EB3FB6F5EB}"/>
+                <a16:creationId xmlns:a16="http://schemas.microsoft.com/office/drawing/2014/main" id="{A12303EB-0F60-48AA-8DF3-7B8475BEF5B3}"/>
               </a:ext>
             </a:extLst>
           </p:cNvPr>
@@ -6159,7 +6159,7 @@
           <p:cNvPr id="10" name="">
             <a:extLst xmlns:a="http://schemas.openxmlformats.org/drawingml/2006/main">
               <a:ext uri="{FF2B5EF4-FFF2-40B4-BE49-F238E27FC236}">
-                <a16:creationId xmlns:a16="http://schemas.microsoft.com/office/drawing/2014/main" id="{78036638-EB57-48F9-B5C6-B5E08B3237A6}"/>
+                <a16:creationId xmlns:a16="http://schemas.microsoft.com/office/drawing/2014/main" id="{6C4ACF82-26A7-42C9-9DF1-85087426D5C5}"/>
               </a:ext>
             </a:extLst>
           </p:cNvPr>
@@ -6189,7 +6189,7 @@
           <p:cNvPr id="11" name="">
             <a:extLst xmlns:a="http://schemas.openxmlformats.org/drawingml/2006/main">
               <a:ext uri="{FF2B5EF4-FFF2-40B4-BE49-F238E27FC236}">
-                <a16:creationId xmlns:a16="http://schemas.microsoft.com/office/drawing/2014/main" id="{B6C6AECB-2B9D-4F8E-ADE8-3AB5A56F4210}"/>
+                <a16:creationId xmlns:a16="http://schemas.microsoft.com/office/drawing/2014/main" id="{D26E6C0A-1BDD-4EF2-8948-5ED7150BD7CE}"/>
               </a:ext>
             </a:extLst>
           </p:cNvPr>
@@ -6221,7 +6221,7 @@
           <p:cNvPr id="12" name="">
             <a:extLst xmlns:a="http://schemas.openxmlformats.org/drawingml/2006/main">
               <a:ext uri="{FF2B5EF4-FFF2-40B4-BE49-F238E27FC236}">
-                <a16:creationId xmlns:a16="http://schemas.microsoft.com/office/drawing/2014/main" id="{285873CA-AACF-4E70-B340-442E9952923D}"/>
+                <a16:creationId xmlns:a16="http://schemas.microsoft.com/office/drawing/2014/main" id="{7F06B4F2-242F-4EC8-870A-22A902523B09}"/>
               </a:ext>
             </a:extLst>
           </p:cNvPr>
@@ -6278,7 +6278,7 @@
           <p:cNvPr id="13" name="">
             <a:extLst xmlns:a="http://schemas.openxmlformats.org/drawingml/2006/main">
               <a:ext uri="{FF2B5EF4-FFF2-40B4-BE49-F238E27FC236}">
-                <a16:creationId xmlns:a16="http://schemas.microsoft.com/office/drawing/2014/main" id="{CF0A8E2D-C96F-41F7-B3BA-4AAAA14211CE}"/>
+                <a16:creationId xmlns:a16="http://schemas.microsoft.com/office/drawing/2014/main" id="{828C4184-78C9-49D2-8D5D-92E6CA8703D7}"/>
               </a:ext>
             </a:extLst>
           </p:cNvPr>
@@ -6308,7 +6308,7 @@
           <p:cNvPr id="14" name="">
             <a:extLst xmlns:a="http://schemas.openxmlformats.org/drawingml/2006/main">
               <a:ext uri="{FF2B5EF4-FFF2-40B4-BE49-F238E27FC236}">
-                <a16:creationId xmlns:a16="http://schemas.microsoft.com/office/drawing/2014/main" id="{4DA80675-25E3-43F6-B968-DDC1C4159624}"/>
+                <a16:creationId xmlns:a16="http://schemas.microsoft.com/office/drawing/2014/main" id="{0F6FCE0D-DF9F-45BC-93CC-2FB68C9A2FD6}"/>
               </a:ext>
             </a:extLst>
           </p:cNvPr>
@@ -6338,7 +6338,7 @@
           <p:cNvPr id="15" name="">
             <a:extLst xmlns:a="http://schemas.openxmlformats.org/drawingml/2006/main">
               <a:ext uri="{FF2B5EF4-FFF2-40B4-BE49-F238E27FC236}">
-                <a16:creationId xmlns:a16="http://schemas.microsoft.com/office/drawing/2014/main" id="{CF0CC9AE-9755-404C-93FA-9C7FC8769598}"/>
+                <a16:creationId xmlns:a16="http://schemas.microsoft.com/office/drawing/2014/main" id="{9C89F104-4C99-4075-A6F1-C518EFFA6FCB}"/>
               </a:ext>
             </a:extLst>
           </p:cNvPr>
@@ -6368,7 +6368,7 @@
           <p:cNvPr id="16" name="">
             <a:extLst xmlns:a="http://schemas.openxmlformats.org/drawingml/2006/main">
               <a:ext uri="{FF2B5EF4-FFF2-40B4-BE49-F238E27FC236}">
-                <a16:creationId xmlns:a16="http://schemas.microsoft.com/office/drawing/2014/main" id="{A501453B-543E-4153-BF21-1BB343AA6244}"/>
+                <a16:creationId xmlns:a16="http://schemas.microsoft.com/office/drawing/2014/main" id="{9E1FCB1C-9AC6-4640-8043-F1084ED09371}"/>
               </a:ext>
             </a:extLst>
           </p:cNvPr>
@@ -6400,7 +6400,7 @@
           <p:cNvPr id="17" name="">
             <a:extLst xmlns:a="http://schemas.openxmlformats.org/drawingml/2006/main">
               <a:ext uri="{FF2B5EF4-FFF2-40B4-BE49-F238E27FC236}">
-                <a16:creationId xmlns:a16="http://schemas.microsoft.com/office/drawing/2014/main" id="{2D9D1539-CC71-4052-B63B-95F1A4075160}"/>
+                <a16:creationId xmlns:a16="http://schemas.microsoft.com/office/drawing/2014/main" id="{97BF0ACB-1F58-4E46-B762-183110AEC49F}"/>
               </a:ext>
             </a:extLst>
           </p:cNvPr>
@@ -6457,7 +6457,7 @@
           <p:cNvPr id="18" name="">
             <a:extLst xmlns:a="http://schemas.openxmlformats.org/drawingml/2006/main">
               <a:ext uri="{FF2B5EF4-FFF2-40B4-BE49-F238E27FC236}">
-                <a16:creationId xmlns:a16="http://schemas.microsoft.com/office/drawing/2014/main" id="{ED92C76F-5C1A-4D14-B763-7747548D382A}"/>
+                <a16:creationId xmlns:a16="http://schemas.microsoft.com/office/drawing/2014/main" id="{1B1D5258-B9C6-4224-9E10-99DF6A554334}"/>
               </a:ext>
             </a:extLst>
           </p:cNvPr>
@@ -6487,7 +6487,7 @@
           <p:cNvPr id="19" name="">
             <a:extLst xmlns:a="http://schemas.openxmlformats.org/drawingml/2006/main">
               <a:ext uri="{FF2B5EF4-FFF2-40B4-BE49-F238E27FC236}">
-                <a16:creationId xmlns:a16="http://schemas.microsoft.com/office/drawing/2014/main" id="{BDCBF7DA-C6AA-4583-8C86-5D7784E303FC}"/>
+                <a16:creationId xmlns:a16="http://schemas.microsoft.com/office/drawing/2014/main" id="{D0A85431-FFC7-4A4A-8346-A81094A80698}"/>
               </a:ext>
             </a:extLst>
           </p:cNvPr>
@@ -6517,7 +6517,7 @@
           <p:cNvPr id="20" name="">
             <a:extLst xmlns:a="http://schemas.openxmlformats.org/drawingml/2006/main">
               <a:ext uri="{FF2B5EF4-FFF2-40B4-BE49-F238E27FC236}">
-                <a16:creationId xmlns:a16="http://schemas.microsoft.com/office/drawing/2014/main" id="{C0C61195-119A-4457-85B7-B889EACCE517}"/>
+                <a16:creationId xmlns:a16="http://schemas.microsoft.com/office/drawing/2014/main" id="{CB2CCCD0-2667-4E06-B1EE-213E0940348D}"/>
               </a:ext>
             </a:extLst>
           </p:cNvPr>
@@ -6547,7 +6547,7 @@
           <p:cNvPr id="21" name="">
             <a:extLst xmlns:a="http://schemas.openxmlformats.org/drawingml/2006/main">
               <a:ext uri="{FF2B5EF4-FFF2-40B4-BE49-F238E27FC236}">
-                <a16:creationId xmlns:a16="http://schemas.microsoft.com/office/drawing/2014/main" id="{BEFD14FE-65AF-4A89-B7F5-F90D765D5401}"/>
+                <a16:creationId xmlns:a16="http://schemas.microsoft.com/office/drawing/2014/main" id="{D435EDCA-1061-44F4-A533-51C1EE2D0E17}"/>
               </a:ext>
             </a:extLst>
           </p:cNvPr>
@@ -6579,7 +6579,7 @@
           <p:cNvPr id="22" name="">
             <a:extLst xmlns:a="http://schemas.openxmlformats.org/drawingml/2006/main">
               <a:ext uri="{FF2B5EF4-FFF2-40B4-BE49-F238E27FC236}">
-                <a16:creationId xmlns:a16="http://schemas.microsoft.com/office/drawing/2014/main" id="{FC252CA5-F6DB-45B3-B925-9CBBE9086F13}"/>
+                <a16:creationId xmlns:a16="http://schemas.microsoft.com/office/drawing/2014/main" id="{80701612-6120-45C0-A539-5795BD0D3ACC}"/>
               </a:ext>
             </a:extLst>
           </p:cNvPr>
@@ -6636,7 +6636,7 @@
           <p:cNvPr id="23" name="">
             <a:extLst xmlns:a="http://schemas.openxmlformats.org/drawingml/2006/main">
               <a:ext uri="{FF2B5EF4-FFF2-40B4-BE49-F238E27FC236}">
-                <a16:creationId xmlns:a16="http://schemas.microsoft.com/office/drawing/2014/main" id="{ED58757C-A585-4851-990C-F3530CD50C11}"/>
+                <a16:creationId xmlns:a16="http://schemas.microsoft.com/office/drawing/2014/main" id="{68BF328E-8AA8-44B9-9BE9-38861A31F467}"/>
               </a:ext>
             </a:extLst>
           </p:cNvPr>
@@ -6693,7 +6693,7 @@
           <p:cNvPr id="24" name="">
             <a:extLst xmlns:a="http://schemas.openxmlformats.org/drawingml/2006/main">
               <a:ext uri="{FF2B5EF4-FFF2-40B4-BE49-F238E27FC236}">
-                <a16:creationId xmlns:a16="http://schemas.microsoft.com/office/drawing/2014/main" id="{9CF17AF8-E2EC-4D59-A1B7-49C14AF9872A}"/>
+                <a16:creationId xmlns:a16="http://schemas.microsoft.com/office/drawing/2014/main" id="{E7A26A21-F794-4B36-B061-1843BE5F0AF9}"/>
               </a:ext>
             </a:extLst>
           </p:cNvPr>
@@ -6750,7 +6750,7 @@
           <p:cNvPr id="25" name="">
             <a:extLst xmlns:a="http://schemas.openxmlformats.org/drawingml/2006/main">
               <a:ext uri="{FF2B5EF4-FFF2-40B4-BE49-F238E27FC236}">
-                <a16:creationId xmlns:a16="http://schemas.microsoft.com/office/drawing/2014/main" id="{AA4487A5-9108-4D3B-8C25-FFB41125D604}"/>
+                <a16:creationId xmlns:a16="http://schemas.microsoft.com/office/drawing/2014/main" id="{0D6A9437-0447-44A5-9349-0727484E6117}"/>
               </a:ext>
             </a:extLst>
           </p:cNvPr>
@@ -6807,7 +6807,7 @@
           <p:cNvPr id="26" name="">
             <a:extLst xmlns:a="http://schemas.openxmlformats.org/drawingml/2006/main">
               <a:ext uri="{FF2B5EF4-FFF2-40B4-BE49-F238E27FC236}">
-                <a16:creationId xmlns:a16="http://schemas.microsoft.com/office/drawing/2014/main" id="{EF254725-A22A-48FD-899E-D0AD54CCC844}"/>
+                <a16:creationId xmlns:a16="http://schemas.microsoft.com/office/drawing/2014/main" id="{C913487C-6173-4380-BEC4-C99759F44B7B}"/>
               </a:ext>
             </a:extLst>
           </p:cNvPr>
@@ -6871,7 +6871,7 @@
         </p:xfrm>
         <a:graphic xmlns:a="http://schemas.openxmlformats.org/drawingml/2006/main">
           <a:graphicData uri="http://schemas.openxmlformats.org/drawingml/2006/chart">
-            <c:chart xmlns:r="http://schemas.openxmlformats.org/officeDocument/2006/relationships" xmlns:c="http://schemas.openxmlformats.org/drawingml/2006/chart" r:id="Rd6b4f57998364c27"/>
+            <c:chart xmlns:r="http://schemas.openxmlformats.org/officeDocument/2006/relationships" xmlns:c="http://schemas.openxmlformats.org/drawingml/2006/chart" r:id="Rb0f61ff163204f58"/>
           </a:graphicData>
         </a:graphic>
       </p:graphicFrame>
@@ -6880,7 +6880,7 @@
           <p:cNvPr id="28" name="">
             <a:extLst xmlns:a="http://schemas.openxmlformats.org/drawingml/2006/main">
               <a:ext uri="{FF2B5EF4-FFF2-40B4-BE49-F238E27FC236}">
-                <a16:creationId xmlns:a16="http://schemas.microsoft.com/office/drawing/2014/main" id="{D82F7531-0927-4043-A659-694BF2CC48B7}"/>
+                <a16:creationId xmlns:a16="http://schemas.microsoft.com/office/drawing/2014/main" id="{4CF5A919-3CE2-4EE5-9AF7-06AF8D76C096}"/>
               </a:ext>
             </a:extLst>
           </p:cNvPr>
@@ -6935,7 +6935,7 @@
     </p:spTree>
     <p:extLst>
       <p:ext uri="{BB962C8B-B14F-4D97-AF65-F5344CB8AC3E}">
-        <p14:creationId xmlns:p14="http://schemas.microsoft.com/office/powerpoint/2010/main" val="2061804901"/>
+        <p14:creationId xmlns:p14="http://schemas.microsoft.com/office/powerpoint/2010/main" val="712006930"/>
       </p:ext>
     </p:extLst>
   </p:cSld>
@@ -6966,7 +6966,7 @@
           <p:cNvPr id="9" name="">
             <a:extLst xmlns:a="http://schemas.openxmlformats.org/drawingml/2006/main">
               <a:ext uri="{FF2B5EF4-FFF2-40B4-BE49-F238E27FC236}">
-                <a16:creationId xmlns:a16="http://schemas.microsoft.com/office/drawing/2014/main" id="{58CA93F7-ECE4-46B0-A67E-BAA8D5F20790}"/>
+                <a16:creationId xmlns:a16="http://schemas.microsoft.com/office/drawing/2014/main" id="{2DF8188E-2BB2-4A5A-8137-C9B5DB3A290F}"/>
               </a:ext>
             </a:extLst>
           </p:cNvPr>
@@ -7023,7 +7023,7 @@
           <p:cNvPr id="2" name="">
             <a:extLst xmlns:a="http://schemas.openxmlformats.org/drawingml/2006/main">
               <a:ext uri="{FF2B5EF4-FFF2-40B4-BE49-F238E27FC236}">
-                <a16:creationId xmlns:a16="http://schemas.microsoft.com/office/drawing/2014/main" id="{8C213D84-E965-4465-90BA-3D55A16FA92A}"/>
+                <a16:creationId xmlns:a16="http://schemas.microsoft.com/office/drawing/2014/main" id="{4C834C29-630B-4742-938B-34CD78525B79}"/>
               </a:ext>
             </a:extLst>
           </p:cNvPr>
@@ -7080,7 +7080,7 @@
           <p:cNvPr id="3" name="">
             <a:extLst xmlns:a="http://schemas.openxmlformats.org/drawingml/2006/main">
               <a:ext uri="{FF2B5EF4-FFF2-40B4-BE49-F238E27FC236}">
-                <a16:creationId xmlns:a16="http://schemas.microsoft.com/office/drawing/2014/main" id="{F02430A7-C0BE-48AF-93DB-2B066577871C}"/>
+                <a16:creationId xmlns:a16="http://schemas.microsoft.com/office/drawing/2014/main" id="{29046193-E5ED-4454-A7D2-7FECFA1A6881}"/>
               </a:ext>
             </a:extLst>
           </p:cNvPr>
@@ -7137,7 +7137,7 @@
           <p:cNvPr id="4" name="">
             <a:extLst xmlns:a="http://schemas.openxmlformats.org/drawingml/2006/main">
               <a:ext uri="{FF2B5EF4-FFF2-40B4-BE49-F238E27FC236}">
-                <a16:creationId xmlns:a16="http://schemas.microsoft.com/office/drawing/2014/main" id="{77C6B2A6-ED72-4153-B730-8A5DAB354FF0}"/>
+                <a16:creationId xmlns:a16="http://schemas.microsoft.com/office/drawing/2014/main" id="{8E867124-21C7-436F-9E8D-AEBBAD4EE70B}"/>
               </a:ext>
             </a:extLst>
           </p:cNvPr>
@@ -7194,7 +7194,7 @@
           <p:cNvPr id="5" name="">
             <a:extLst xmlns:a="http://schemas.openxmlformats.org/drawingml/2006/main">
               <a:ext uri="{FF2B5EF4-FFF2-40B4-BE49-F238E27FC236}">
-                <a16:creationId xmlns:a16="http://schemas.microsoft.com/office/drawing/2014/main" id="{057B11AC-1BC0-49EC-B961-67B71F105EC6}"/>
+                <a16:creationId xmlns:a16="http://schemas.microsoft.com/office/drawing/2014/main" id="{3C694967-4EA4-4B7E-9C8B-920D48B2F846}"/>
               </a:ext>
             </a:extLst>
           </p:cNvPr>
@@ -7251,7 +7251,7 @@
           <p:cNvPr id="6" name="">
             <a:extLst xmlns:a="http://schemas.openxmlformats.org/drawingml/2006/main">
               <a:ext uri="{FF2B5EF4-FFF2-40B4-BE49-F238E27FC236}">
-                <a16:creationId xmlns:a16="http://schemas.microsoft.com/office/drawing/2014/main" id="{37FC51F3-C7EA-41C6-B835-490DED855A7F}"/>
+                <a16:creationId xmlns:a16="http://schemas.microsoft.com/office/drawing/2014/main" id="{D3EA8F83-07FF-47B8-99CA-27C0806DE0AC}"/>
               </a:ext>
             </a:extLst>
           </p:cNvPr>
@@ -7308,7 +7308,7 @@
           <p:cNvPr id="7" name="">
             <a:extLst xmlns:a="http://schemas.openxmlformats.org/drawingml/2006/main">
               <a:ext uri="{FF2B5EF4-FFF2-40B4-BE49-F238E27FC236}">
-                <a16:creationId xmlns:a16="http://schemas.microsoft.com/office/drawing/2014/main" id="{1EB7F28A-F8F6-485F-B8FC-50E413E967E1}"/>
+                <a16:creationId xmlns:a16="http://schemas.microsoft.com/office/drawing/2014/main" id="{51E86504-512D-444A-AA65-EE8352CD47DF}"/>
               </a:ext>
             </a:extLst>
           </p:cNvPr>
@@ -7365,7 +7365,7 @@
           <p:cNvPr id="8" name="">
             <a:extLst xmlns:a="http://schemas.openxmlformats.org/drawingml/2006/main">
               <a:ext uri="{FF2B5EF4-FFF2-40B4-BE49-F238E27FC236}">
-                <a16:creationId xmlns:a16="http://schemas.microsoft.com/office/drawing/2014/main" id="{6474F14A-E31B-49EB-8CE3-59367C4DB552}"/>
+                <a16:creationId xmlns:a16="http://schemas.microsoft.com/office/drawing/2014/main" id="{61EF896A-D094-4E7B-9EF5-4830B5E36896}"/>
               </a:ext>
             </a:extLst>
           </p:cNvPr>
@@ -7420,7 +7420,7 @@
     </p:spTree>
     <p:extLst>
       <p:ext uri="{BB962C8B-B14F-4D97-AF65-F5344CB8AC3E}">
-        <p14:creationId xmlns:p14="http://schemas.microsoft.com/office/powerpoint/2010/main" val="52827637"/>
+        <p14:creationId xmlns:p14="http://schemas.microsoft.com/office/powerpoint/2010/main" val="126438906"/>
       </p:ext>
     </p:extLst>
   </p:cSld>
@@ -7451,7 +7451,7 @@
           <p:cNvPr id="38" name="">
             <a:extLst xmlns:a="http://schemas.openxmlformats.org/drawingml/2006/main">
               <a:ext uri="{FF2B5EF4-FFF2-40B4-BE49-F238E27FC236}">
-                <a16:creationId xmlns:a16="http://schemas.microsoft.com/office/drawing/2014/main" id="{EC8D476E-D407-4D02-BEF3-C51565473220}"/>
+                <a16:creationId xmlns:a16="http://schemas.microsoft.com/office/drawing/2014/main" id="{C7DF6C71-89FB-4B32-A890-7DEB828F3A9A}"/>
               </a:ext>
             </a:extLst>
           </p:cNvPr>
@@ -7508,7 +7508,7 @@
           <p:cNvPr id="2" name="">
             <a:extLst xmlns:a="http://schemas.openxmlformats.org/drawingml/2006/main">
               <a:ext uri="{FF2B5EF4-FFF2-40B4-BE49-F238E27FC236}">
-                <a16:creationId xmlns:a16="http://schemas.microsoft.com/office/drawing/2014/main" id="{D461E93B-A1F3-4946-A07F-A6B4DA053DD2}"/>
+                <a16:creationId xmlns:a16="http://schemas.microsoft.com/office/drawing/2014/main" id="{AECC5A4A-0023-493F-A059-43A27E563573}"/>
               </a:ext>
             </a:extLst>
           </p:cNvPr>
@@ -7565,7 +7565,7 @@
           <p:cNvPr id="3" name="">
             <a:extLst xmlns:a="http://schemas.openxmlformats.org/drawingml/2006/main">
               <a:ext uri="{FF2B5EF4-FFF2-40B4-BE49-F238E27FC236}">
-                <a16:creationId xmlns:a16="http://schemas.microsoft.com/office/drawing/2014/main" id="{DD1F82AF-D917-48DC-AB6A-1D42BE35D643}"/>
+                <a16:creationId xmlns:a16="http://schemas.microsoft.com/office/drawing/2014/main" id="{8A7E2DF1-16AF-44C0-B071-8F889266E0C1}"/>
               </a:ext>
             </a:extLst>
           </p:cNvPr>
@@ -7594,7 +7594,7 @@
           <p:cNvPr id="4" name="">
             <a:extLst xmlns:a="http://schemas.openxmlformats.org/drawingml/2006/main">
               <a:ext uri="{FF2B5EF4-FFF2-40B4-BE49-F238E27FC236}">
-                <a16:creationId xmlns:a16="http://schemas.microsoft.com/office/drawing/2014/main" id="{18D2B841-CCA9-496E-AC0D-E06ADA2CC65A}"/>
+                <a16:creationId xmlns:a16="http://schemas.microsoft.com/office/drawing/2014/main" id="{E08410EB-70FD-44CC-83F1-2F1D7689E510}"/>
               </a:ext>
             </a:extLst>
           </p:cNvPr>
@@ -7651,7 +7651,7 @@
           <p:cNvPr id="5" name="">
             <a:extLst xmlns:a="http://schemas.openxmlformats.org/drawingml/2006/main">
               <a:ext uri="{FF2B5EF4-FFF2-40B4-BE49-F238E27FC236}">
-                <a16:creationId xmlns:a16="http://schemas.microsoft.com/office/drawing/2014/main" id="{C2FD6FC4-9E88-4633-B542-90634D9207A1}"/>
+                <a16:creationId xmlns:a16="http://schemas.microsoft.com/office/drawing/2014/main" id="{C5A0AF7B-DF99-4594-9616-9D29163AA88D}"/>
               </a:ext>
             </a:extLst>
           </p:cNvPr>
@@ -7708,7 +7708,7 @@
           <p:cNvPr id="6" name="">
             <a:extLst xmlns:a="http://schemas.openxmlformats.org/drawingml/2006/main">
               <a:ext uri="{FF2B5EF4-FFF2-40B4-BE49-F238E27FC236}">
-                <a16:creationId xmlns:a16="http://schemas.microsoft.com/office/drawing/2014/main" id="{5976DF22-B7A8-4549-8D4A-4CA125FDD191}"/>
+                <a16:creationId xmlns:a16="http://schemas.microsoft.com/office/drawing/2014/main" id="{9A254547-CCE7-4889-ACCE-3DF57EA7E329}"/>
               </a:ext>
             </a:extLst>
           </p:cNvPr>
@@ -7737,7 +7737,7 @@
           <p:cNvPr id="7" name="">
             <a:extLst xmlns:a="http://schemas.openxmlformats.org/drawingml/2006/main">
               <a:ext uri="{FF2B5EF4-FFF2-40B4-BE49-F238E27FC236}">
-                <a16:creationId xmlns:a16="http://schemas.microsoft.com/office/drawing/2014/main" id="{32A8FB7E-DA18-4A05-AF92-360E5BD57A5A}"/>
+                <a16:creationId xmlns:a16="http://schemas.microsoft.com/office/drawing/2014/main" id="{6C733EDA-629E-4269-ACEB-8C17982E8BCA}"/>
               </a:ext>
             </a:extLst>
           </p:cNvPr>
@@ -7769,7 +7769,7 @@
           <p:cNvPr id="8" name="">
             <a:extLst xmlns:a="http://schemas.openxmlformats.org/drawingml/2006/main">
               <a:ext uri="{FF2B5EF4-FFF2-40B4-BE49-F238E27FC236}">
-                <a16:creationId xmlns:a16="http://schemas.microsoft.com/office/drawing/2014/main" id="{0E026B39-9343-464B-BFD2-D727ACA3D54E}"/>
+                <a16:creationId xmlns:a16="http://schemas.microsoft.com/office/drawing/2014/main" id="{29472EAF-9E38-4F10-8BD7-1409A63DC435}"/>
               </a:ext>
             </a:extLst>
           </p:cNvPr>
@@ -7801,7 +7801,7 @@
           <p:cNvPr id="9" name="">
             <a:extLst xmlns:a="http://schemas.openxmlformats.org/drawingml/2006/main">
               <a:ext uri="{FF2B5EF4-FFF2-40B4-BE49-F238E27FC236}">
-                <a16:creationId xmlns:a16="http://schemas.microsoft.com/office/drawing/2014/main" id="{9E1AF9C2-A6EE-4032-B1C8-4A4727DEBB1F}"/>
+                <a16:creationId xmlns:a16="http://schemas.microsoft.com/office/drawing/2014/main" id="{5BDB4CBD-12B9-4827-9F6E-63950AC095EA}"/>
               </a:ext>
             </a:extLst>
           </p:cNvPr>
@@ -7858,7 +7858,7 @@
           <p:cNvPr id="10" name="">
             <a:extLst xmlns:a="http://schemas.openxmlformats.org/drawingml/2006/main">
               <a:ext uri="{FF2B5EF4-FFF2-40B4-BE49-F238E27FC236}">
-                <a16:creationId xmlns:a16="http://schemas.microsoft.com/office/drawing/2014/main" id="{39A740C5-E32A-4F60-9D3E-7AC882E3A202}"/>
+                <a16:creationId xmlns:a16="http://schemas.microsoft.com/office/drawing/2014/main" id="{28A3BA3C-DAD5-4272-9647-7549A5569201}"/>
               </a:ext>
             </a:extLst>
           </p:cNvPr>
@@ -7915,7 +7915,7 @@
           <p:cNvPr id="11" name="">
             <a:extLst xmlns:a="http://schemas.openxmlformats.org/drawingml/2006/main">
               <a:ext uri="{FF2B5EF4-FFF2-40B4-BE49-F238E27FC236}">
-                <a16:creationId xmlns:a16="http://schemas.microsoft.com/office/drawing/2014/main" id="{F5499696-91AE-481E-A70C-81C6589A2B83}"/>
+                <a16:creationId xmlns:a16="http://schemas.microsoft.com/office/drawing/2014/main" id="{012B3A94-869D-4983-9CC1-6AADBE54FF60}"/>
               </a:ext>
             </a:extLst>
           </p:cNvPr>
@@ -7944,7 +7944,7 @@
           <p:cNvPr id="12" name="">
             <a:extLst xmlns:a="http://schemas.openxmlformats.org/drawingml/2006/main">
               <a:ext uri="{FF2B5EF4-FFF2-40B4-BE49-F238E27FC236}">
-                <a16:creationId xmlns:a16="http://schemas.microsoft.com/office/drawing/2014/main" id="{0401F340-8E90-4B81-A6F2-DA0FFB68FDEC}"/>
+                <a16:creationId xmlns:a16="http://schemas.microsoft.com/office/drawing/2014/main" id="{3CD226A0-A477-4AE1-8C65-123661B45726}"/>
               </a:ext>
             </a:extLst>
           </p:cNvPr>
@@ -8001,7 +8001,7 @@
           <p:cNvPr id="13" name="">
             <a:extLst xmlns:a="http://schemas.openxmlformats.org/drawingml/2006/main">
               <a:ext uri="{FF2B5EF4-FFF2-40B4-BE49-F238E27FC236}">
-                <a16:creationId xmlns:a16="http://schemas.microsoft.com/office/drawing/2014/main" id="{C616F4AF-2695-48B1-8597-CD5839353A31}"/>
+                <a16:creationId xmlns:a16="http://schemas.microsoft.com/office/drawing/2014/main" id="{0DB18A76-7FC1-4A07-92FF-EFACD9962311}"/>
               </a:ext>
             </a:extLst>
           </p:cNvPr>
@@ -8058,7 +8058,7 @@
           <p:cNvPr id="14" name="">
             <a:extLst xmlns:a="http://schemas.openxmlformats.org/drawingml/2006/main">
               <a:ext uri="{FF2B5EF4-FFF2-40B4-BE49-F238E27FC236}">
-                <a16:creationId xmlns:a16="http://schemas.microsoft.com/office/drawing/2014/main" id="{D909DAA6-24F0-40BE-8972-2C1CBCBE2F4E}"/>
+                <a16:creationId xmlns:a16="http://schemas.microsoft.com/office/drawing/2014/main" id="{9FAA0414-75AB-4F5D-AAD0-868477363FF1}"/>
               </a:ext>
             </a:extLst>
           </p:cNvPr>
@@ -8087,7 +8087,7 @@
           <p:cNvPr id="15" name="">
             <a:extLst xmlns:a="http://schemas.openxmlformats.org/drawingml/2006/main">
               <a:ext uri="{FF2B5EF4-FFF2-40B4-BE49-F238E27FC236}">
-                <a16:creationId xmlns:a16="http://schemas.microsoft.com/office/drawing/2014/main" id="{6A9F93DB-2335-4753-B204-78787D6BF87A}"/>
+                <a16:creationId xmlns:a16="http://schemas.microsoft.com/office/drawing/2014/main" id="{51CE69FB-24D1-4ACF-B2BB-036BE83E0A0F}"/>
               </a:ext>
             </a:extLst>
           </p:cNvPr>
@@ -8119,7 +8119,7 @@
           <p:cNvPr id="16" name="">
             <a:extLst xmlns:a="http://schemas.openxmlformats.org/drawingml/2006/main">
               <a:ext uri="{FF2B5EF4-FFF2-40B4-BE49-F238E27FC236}">
-                <a16:creationId xmlns:a16="http://schemas.microsoft.com/office/drawing/2014/main" id="{B3B176CB-9EF6-4BB8-9A1F-4F8769861B81}"/>
+                <a16:creationId xmlns:a16="http://schemas.microsoft.com/office/drawing/2014/main" id="{A63A423C-363D-4741-9DC5-C1BA1198A8C8}"/>
               </a:ext>
             </a:extLst>
           </p:cNvPr>
@@ -8151,7 +8151,7 @@
           <p:cNvPr id="17" name="">
             <a:extLst xmlns:a="http://schemas.openxmlformats.org/drawingml/2006/main">
               <a:ext uri="{FF2B5EF4-FFF2-40B4-BE49-F238E27FC236}">
-                <a16:creationId xmlns:a16="http://schemas.microsoft.com/office/drawing/2014/main" id="{94D58739-CE46-41BC-8057-9D6EA0692D68}"/>
+                <a16:creationId xmlns:a16="http://schemas.microsoft.com/office/drawing/2014/main" id="{7AFE6ED5-404F-45A5-8737-663720CDF7F1}"/>
               </a:ext>
             </a:extLst>
           </p:cNvPr>
@@ -8208,7 +8208,7 @@
           <p:cNvPr id="18" name="">
             <a:extLst xmlns:a="http://schemas.openxmlformats.org/drawingml/2006/main">
               <a:ext uri="{FF2B5EF4-FFF2-40B4-BE49-F238E27FC236}">
-                <a16:creationId xmlns:a16="http://schemas.microsoft.com/office/drawing/2014/main" id="{6A6824CB-2CB9-4C2F-B06E-1042D7A2FDC7}"/>
+                <a16:creationId xmlns:a16="http://schemas.microsoft.com/office/drawing/2014/main" id="{FAB131B4-D48F-41C8-A0E2-F58DB7BBA6B8}"/>
               </a:ext>
             </a:extLst>
           </p:cNvPr>
@@ -8265,7 +8265,7 @@
           <p:cNvPr id="19" name="">
             <a:extLst xmlns:a="http://schemas.openxmlformats.org/drawingml/2006/main">
               <a:ext uri="{FF2B5EF4-FFF2-40B4-BE49-F238E27FC236}">
-                <a16:creationId xmlns:a16="http://schemas.microsoft.com/office/drawing/2014/main" id="{F95AD2FB-4703-450C-AABF-03537F71B9E2}"/>
+                <a16:creationId xmlns:a16="http://schemas.microsoft.com/office/drawing/2014/main" id="{15F80B80-291D-4122-ABC7-EB20AC32B0FB}"/>
               </a:ext>
             </a:extLst>
           </p:cNvPr>
@@ -8294,7 +8294,7 @@
           <p:cNvPr id="20" name="">
             <a:extLst xmlns:a="http://schemas.openxmlformats.org/drawingml/2006/main">
               <a:ext uri="{FF2B5EF4-FFF2-40B4-BE49-F238E27FC236}">
-                <a16:creationId xmlns:a16="http://schemas.microsoft.com/office/drawing/2014/main" id="{A9F818BF-48CA-43E0-A2DE-8784E92D2EF2}"/>
+                <a16:creationId xmlns:a16="http://schemas.microsoft.com/office/drawing/2014/main" id="{BF14865A-3DD2-40F5-A083-5B88D4D70083}"/>
               </a:ext>
             </a:extLst>
           </p:cNvPr>
@@ -8351,7 +8351,7 @@
           <p:cNvPr id="21" name="">
             <a:extLst xmlns:a="http://schemas.openxmlformats.org/drawingml/2006/main">
               <a:ext uri="{FF2B5EF4-FFF2-40B4-BE49-F238E27FC236}">
-                <a16:creationId xmlns:a16="http://schemas.microsoft.com/office/drawing/2014/main" id="{569506BE-3FC7-4424-B926-3390C4962870}"/>
+                <a16:creationId xmlns:a16="http://schemas.microsoft.com/office/drawing/2014/main" id="{6EDFA1EA-9192-4EBE-B9F6-9071DD95973A}"/>
               </a:ext>
             </a:extLst>
           </p:cNvPr>
@@ -8408,7 +8408,7 @@
           <p:cNvPr id="22" name="">
             <a:extLst xmlns:a="http://schemas.openxmlformats.org/drawingml/2006/main">
               <a:ext uri="{FF2B5EF4-FFF2-40B4-BE49-F238E27FC236}">
-                <a16:creationId xmlns:a16="http://schemas.microsoft.com/office/drawing/2014/main" id="{B02DEEF9-F352-4E16-ACA2-A3E37DC03F3F}"/>
+                <a16:creationId xmlns:a16="http://schemas.microsoft.com/office/drawing/2014/main" id="{FF68FD1A-7478-4D60-B88C-491C7B58BED9}"/>
               </a:ext>
             </a:extLst>
           </p:cNvPr>
@@ -8437,7 +8437,7 @@
           <p:cNvPr id="23" name="">
             <a:extLst xmlns:a="http://schemas.openxmlformats.org/drawingml/2006/main">
               <a:ext uri="{FF2B5EF4-FFF2-40B4-BE49-F238E27FC236}">
-                <a16:creationId xmlns:a16="http://schemas.microsoft.com/office/drawing/2014/main" id="{B2B89D7B-CDEA-4268-8304-D594EA8B3561}"/>
+                <a16:creationId xmlns:a16="http://schemas.microsoft.com/office/drawing/2014/main" id="{F907F220-24DA-46A7-A7EE-ADA5BCC5BA5A}"/>
               </a:ext>
             </a:extLst>
           </p:cNvPr>
@@ -8469,7 +8469,7 @@
           <p:cNvPr id="24" name="">
             <a:extLst xmlns:a="http://schemas.openxmlformats.org/drawingml/2006/main">
               <a:ext uri="{FF2B5EF4-FFF2-40B4-BE49-F238E27FC236}">
-                <a16:creationId xmlns:a16="http://schemas.microsoft.com/office/drawing/2014/main" id="{B308F4D9-289A-4F5C-B9B8-890B1823756B}"/>
+                <a16:creationId xmlns:a16="http://schemas.microsoft.com/office/drawing/2014/main" id="{8127E08E-FBD8-439D-A5C6-646917C4ADFB}"/>
               </a:ext>
             </a:extLst>
           </p:cNvPr>
@@ -8501,7 +8501,7 @@
           <p:cNvPr id="25" name="">
             <a:extLst xmlns:a="http://schemas.openxmlformats.org/drawingml/2006/main">
               <a:ext uri="{FF2B5EF4-FFF2-40B4-BE49-F238E27FC236}">
-                <a16:creationId xmlns:a16="http://schemas.microsoft.com/office/drawing/2014/main" id="{366ACE09-7C58-4620-BEC9-7ECF21C3E063}"/>
+                <a16:creationId xmlns:a16="http://schemas.microsoft.com/office/drawing/2014/main" id="{02250E8C-71D4-4F1D-B1AD-18E4A7E14418}"/>
               </a:ext>
             </a:extLst>
           </p:cNvPr>
@@ -8558,7 +8558,7 @@
           <p:cNvPr id="26" name="">
             <a:extLst xmlns:a="http://schemas.openxmlformats.org/drawingml/2006/main">
               <a:ext uri="{FF2B5EF4-FFF2-40B4-BE49-F238E27FC236}">
-                <a16:creationId xmlns:a16="http://schemas.microsoft.com/office/drawing/2014/main" id="{F6DC7528-7E9C-40CD-861D-C100F6E227EB}"/>
+                <a16:creationId xmlns:a16="http://schemas.microsoft.com/office/drawing/2014/main" id="{29231700-00F7-4A28-84DA-CCEC88F8B794}"/>
               </a:ext>
             </a:extLst>
           </p:cNvPr>
@@ -8615,7 +8615,7 @@
           <p:cNvPr id="27" name="">
             <a:extLst xmlns:a="http://schemas.openxmlformats.org/drawingml/2006/main">
               <a:ext uri="{FF2B5EF4-FFF2-40B4-BE49-F238E27FC236}">
-                <a16:creationId xmlns:a16="http://schemas.microsoft.com/office/drawing/2014/main" id="{E514CFC0-29CB-4B5F-B6C2-38FE843EC8C2}"/>
+                <a16:creationId xmlns:a16="http://schemas.microsoft.com/office/drawing/2014/main" id="{B07336FE-A470-4E10-B1D4-E8EF5798BFD8}"/>
               </a:ext>
             </a:extLst>
           </p:cNvPr>
@@ -8644,7 +8644,7 @@
           <p:cNvPr id="28" name="">
             <a:extLst xmlns:a="http://schemas.openxmlformats.org/drawingml/2006/main">
               <a:ext uri="{FF2B5EF4-FFF2-40B4-BE49-F238E27FC236}">
-                <a16:creationId xmlns:a16="http://schemas.microsoft.com/office/drawing/2014/main" id="{03F90D15-7F84-42E0-A9CD-18D19C0280C9}"/>
+                <a16:creationId xmlns:a16="http://schemas.microsoft.com/office/drawing/2014/main" id="{A79C706B-0136-4D1A-9E52-980AA3EC1B57}"/>
               </a:ext>
             </a:extLst>
           </p:cNvPr>
@@ -8701,7 +8701,7 @@
           <p:cNvPr id="29" name="">
             <a:extLst xmlns:a="http://schemas.openxmlformats.org/drawingml/2006/main">
               <a:ext uri="{FF2B5EF4-FFF2-40B4-BE49-F238E27FC236}">
-                <a16:creationId xmlns:a16="http://schemas.microsoft.com/office/drawing/2014/main" id="{6F9C4E7A-E275-46BF-B885-0EB212C7F27C}"/>
+                <a16:creationId xmlns:a16="http://schemas.microsoft.com/office/drawing/2014/main" id="{1387D9A4-4C29-4C0B-9B5D-D18421A638F1}"/>
               </a:ext>
             </a:extLst>
           </p:cNvPr>
@@ -8758,7 +8758,7 @@
           <p:cNvPr id="30" name="">
             <a:extLst xmlns:a="http://schemas.openxmlformats.org/drawingml/2006/main">
               <a:ext uri="{FF2B5EF4-FFF2-40B4-BE49-F238E27FC236}">
-                <a16:creationId xmlns:a16="http://schemas.microsoft.com/office/drawing/2014/main" id="{77C9EAAF-A460-429A-8EC3-BFC3E36661B7}"/>
+                <a16:creationId xmlns:a16="http://schemas.microsoft.com/office/drawing/2014/main" id="{D0AFCCE9-6B57-4AB5-9AE0-785F105D9667}"/>
               </a:ext>
             </a:extLst>
           </p:cNvPr>
@@ -8815,7 +8815,7 @@
           <p:cNvPr id="31" name="">
             <a:extLst xmlns:a="http://schemas.openxmlformats.org/drawingml/2006/main">
               <a:ext uri="{FF2B5EF4-FFF2-40B4-BE49-F238E27FC236}">
-                <a16:creationId xmlns:a16="http://schemas.microsoft.com/office/drawing/2014/main" id="{86B1D9E2-7ACF-4B33-B252-9BB81958A166}"/>
+                <a16:creationId xmlns:a16="http://schemas.microsoft.com/office/drawing/2014/main" id="{5D41EED1-1C2E-42B1-90CC-A3AF0D6F2A85}"/>
               </a:ext>
             </a:extLst>
           </p:cNvPr>
@@ -8872,7 +8872,7 @@
           <p:cNvPr id="32" name="">
             <a:extLst xmlns:a="http://schemas.openxmlformats.org/drawingml/2006/main">
               <a:ext uri="{FF2B5EF4-FFF2-40B4-BE49-F238E27FC236}">
-                <a16:creationId xmlns:a16="http://schemas.microsoft.com/office/drawing/2014/main" id="{BB0F8FD2-B295-4A5F-B48D-FCD710E0505A}"/>
+                <a16:creationId xmlns:a16="http://schemas.microsoft.com/office/drawing/2014/main" id="{83083149-3485-44CA-B70D-76F8CF7A80A6}"/>
               </a:ext>
             </a:extLst>
           </p:cNvPr>
@@ -8929,7 +8929,7 @@
           <p:cNvPr id="33" name="">
             <a:extLst xmlns:a="http://schemas.openxmlformats.org/drawingml/2006/main">
               <a:ext uri="{FF2B5EF4-FFF2-40B4-BE49-F238E27FC236}">
-                <a16:creationId xmlns:a16="http://schemas.microsoft.com/office/drawing/2014/main" id="{1C645BD9-C705-4C14-9BB7-C26D6C40CEED}"/>
+                <a16:creationId xmlns:a16="http://schemas.microsoft.com/office/drawing/2014/main" id="{AC08174B-0626-4FAA-82AB-CB91DD91CE60}"/>
               </a:ext>
             </a:extLst>
           </p:cNvPr>
@@ -8986,7 +8986,7 @@
           <p:cNvPr id="34" name="">
             <a:extLst xmlns:a="http://schemas.openxmlformats.org/drawingml/2006/main">
               <a:ext uri="{FF2B5EF4-FFF2-40B4-BE49-F238E27FC236}">
-                <a16:creationId xmlns:a16="http://schemas.microsoft.com/office/drawing/2014/main" id="{EAF07235-13D0-40F7-B638-47D110BBBE57}"/>
+                <a16:creationId xmlns:a16="http://schemas.microsoft.com/office/drawing/2014/main" id="{041A3C43-39F9-49F5-9D82-8E8D99819609}"/>
               </a:ext>
             </a:extLst>
           </p:cNvPr>
@@ -9043,7 +9043,7 @@
           <p:cNvPr id="35" name="">
             <a:extLst xmlns:a="http://schemas.openxmlformats.org/drawingml/2006/main">
               <a:ext uri="{FF2B5EF4-FFF2-40B4-BE49-F238E27FC236}">
-                <a16:creationId xmlns:a16="http://schemas.microsoft.com/office/drawing/2014/main" id="{CE315179-FF75-4054-AE8F-E44903B4826A}"/>
+                <a16:creationId xmlns:a16="http://schemas.microsoft.com/office/drawing/2014/main" id="{87AECDFF-CB3F-4D5D-9067-AD72EB1FAB3C}"/>
               </a:ext>
             </a:extLst>
           </p:cNvPr>
@@ -9100,7 +9100,7 @@
           <p:cNvPr id="36" name="">
             <a:extLst xmlns:a="http://schemas.openxmlformats.org/drawingml/2006/main">
               <a:ext uri="{FF2B5EF4-FFF2-40B4-BE49-F238E27FC236}">
-                <a16:creationId xmlns:a16="http://schemas.microsoft.com/office/drawing/2014/main" id="{1F13FDD4-D086-44EF-A5AB-DC38B9869679}"/>
+                <a16:creationId xmlns:a16="http://schemas.microsoft.com/office/drawing/2014/main" id="{A045F428-E5D9-45C9-8854-F4803A507293}"/>
               </a:ext>
             </a:extLst>
           </p:cNvPr>
@@ -9157,7 +9157,7 @@
           <p:cNvPr id="37" name="">
             <a:extLst xmlns:a="http://schemas.openxmlformats.org/drawingml/2006/main">
               <a:ext uri="{FF2B5EF4-FFF2-40B4-BE49-F238E27FC236}">
-                <a16:creationId xmlns:a16="http://schemas.microsoft.com/office/drawing/2014/main" id="{84F3E833-89D6-40A5-B567-26DE43CD6888}"/>
+                <a16:creationId xmlns:a16="http://schemas.microsoft.com/office/drawing/2014/main" id="{182B42D2-2BF0-4E59-9A0F-1A514224ACA1}"/>
               </a:ext>
             </a:extLst>
           </p:cNvPr>
@@ -9235,7 +9235,7 @@
     </p:spTree>
     <p:extLst>
       <p:ext uri="{BB962C8B-B14F-4D97-AF65-F5344CB8AC3E}">
-        <p14:creationId xmlns:p14="http://schemas.microsoft.com/office/powerpoint/2010/main" val="730552996"/>
+        <p14:creationId xmlns:p14="http://schemas.microsoft.com/office/powerpoint/2010/main" val="443507310"/>
       </p:ext>
     </p:extLst>
   </p:cSld>
@@ -9266,7 +9266,7 @@
           <p:cNvPr id="13" name="">
             <a:extLst xmlns:a="http://schemas.openxmlformats.org/drawingml/2006/main">
               <a:ext uri="{FF2B5EF4-FFF2-40B4-BE49-F238E27FC236}">
-                <a16:creationId xmlns:a16="http://schemas.microsoft.com/office/drawing/2014/main" id="{8FC71263-0F10-4C8F-9D33-597084FC1DEC}"/>
+                <a16:creationId xmlns:a16="http://schemas.microsoft.com/office/drawing/2014/main" id="{0B90AB30-030B-407C-B685-DE3173839010}"/>
               </a:ext>
             </a:extLst>
           </p:cNvPr>
@@ -9323,7 +9323,7 @@
           <p:cNvPr id="2" name="">
             <a:extLst xmlns:a="http://schemas.openxmlformats.org/drawingml/2006/main">
               <a:ext uri="{FF2B5EF4-FFF2-40B4-BE49-F238E27FC236}">
-                <a16:creationId xmlns:a16="http://schemas.microsoft.com/office/drawing/2014/main" id="{8E977276-2392-4879-BD39-DFF9E24D3FEE}"/>
+                <a16:creationId xmlns:a16="http://schemas.microsoft.com/office/drawing/2014/main" id="{F8A2B690-975E-44CF-931D-FEAAB6393F4B}"/>
               </a:ext>
             </a:extLst>
           </p:cNvPr>
@@ -9380,7 +9380,7 @@
           <p:cNvPr id="3" name="">
             <a:extLst xmlns:a="http://schemas.openxmlformats.org/drawingml/2006/main">
               <a:ext uri="{FF2B5EF4-FFF2-40B4-BE49-F238E27FC236}">
-                <a16:creationId xmlns:a16="http://schemas.microsoft.com/office/drawing/2014/main" id="{25E32751-7074-49AD-B641-61A267ED115B}"/>
+                <a16:creationId xmlns:a16="http://schemas.microsoft.com/office/drawing/2014/main" id="{D903A02C-B19C-440B-91C9-C5AA228B94E3}"/>
               </a:ext>
             </a:extLst>
           </p:cNvPr>
@@ -9437,7 +9437,7 @@
           <p:cNvPr id="4" name="">
             <a:extLst xmlns:a="http://schemas.openxmlformats.org/drawingml/2006/main">
               <a:ext uri="{FF2B5EF4-FFF2-40B4-BE49-F238E27FC236}">
-                <a16:creationId xmlns:a16="http://schemas.microsoft.com/office/drawing/2014/main" id="{05142BFF-339A-4D15-8A4F-1AAE9B8542C0}"/>
+                <a16:creationId xmlns:a16="http://schemas.microsoft.com/office/drawing/2014/main" id="{A2BBB65E-7286-4EFE-BEF2-148A600A3A12}"/>
               </a:ext>
             </a:extLst>
           </p:cNvPr>
@@ -9494,7 +9494,7 @@
           <p:cNvPr id="5" name="">
             <a:extLst xmlns:a="http://schemas.openxmlformats.org/drawingml/2006/main">
               <a:ext uri="{FF2B5EF4-FFF2-40B4-BE49-F238E27FC236}">
-                <a16:creationId xmlns:a16="http://schemas.microsoft.com/office/drawing/2014/main" id="{CBB5A957-7371-4323-B562-A87F4215380F}"/>
+                <a16:creationId xmlns:a16="http://schemas.microsoft.com/office/drawing/2014/main" id="{889F53A1-7B3C-42DC-B5D0-251F3DF0B821}"/>
               </a:ext>
             </a:extLst>
           </p:cNvPr>
@@ -9524,7 +9524,7 @@
           <p:cNvPr id="6" name="">
             <a:extLst xmlns:a="http://schemas.openxmlformats.org/drawingml/2006/main">
               <a:ext uri="{FF2B5EF4-FFF2-40B4-BE49-F238E27FC236}">
-                <a16:creationId xmlns:a16="http://schemas.microsoft.com/office/drawing/2014/main" id="{DA00413F-EBCE-4E12-87D8-3E0D793583CE}"/>
+                <a16:creationId xmlns:a16="http://schemas.microsoft.com/office/drawing/2014/main" id="{CE290E3B-E367-476B-9638-BDC267C87256}"/>
               </a:ext>
             </a:extLst>
           </p:cNvPr>
@@ -9581,7 +9581,7 @@
           <p:cNvPr id="7" name="">
             <a:extLst xmlns:a="http://schemas.openxmlformats.org/drawingml/2006/main">
               <a:ext uri="{FF2B5EF4-FFF2-40B4-BE49-F238E27FC236}">
-                <a16:creationId xmlns:a16="http://schemas.microsoft.com/office/drawing/2014/main" id="{01015022-84DA-4E75-A9A3-D31906D9C6B1}"/>
+                <a16:creationId xmlns:a16="http://schemas.microsoft.com/office/drawing/2014/main" id="{A638ED6A-8C92-4BEA-8772-3533DB2AD517}"/>
               </a:ext>
             </a:extLst>
           </p:cNvPr>
@@ -9638,7 +9638,7 @@
           <p:cNvPr id="8" name="">
             <a:extLst xmlns:a="http://schemas.openxmlformats.org/drawingml/2006/main">
               <a:ext uri="{FF2B5EF4-FFF2-40B4-BE49-F238E27FC236}">
-                <a16:creationId xmlns:a16="http://schemas.microsoft.com/office/drawing/2014/main" id="{92278115-CC21-42A3-9525-C37D14971FC7}"/>
+                <a16:creationId xmlns:a16="http://schemas.microsoft.com/office/drawing/2014/main" id="{BCC11D51-8A7D-4B29-8E97-164066C2FA85}"/>
               </a:ext>
             </a:extLst>
           </p:cNvPr>
@@ -9668,7 +9668,7 @@
           <p:cNvPr id="9" name="">
             <a:extLst xmlns:a="http://schemas.openxmlformats.org/drawingml/2006/main">
               <a:ext uri="{FF2B5EF4-FFF2-40B4-BE49-F238E27FC236}">
-                <a16:creationId xmlns:a16="http://schemas.microsoft.com/office/drawing/2014/main" id="{38872D5E-B82F-4121-91FA-0BF59C9F7966}"/>
+                <a16:creationId xmlns:a16="http://schemas.microsoft.com/office/drawing/2014/main" id="{93579313-5944-4685-A5EB-F77BCDEFC72C}"/>
               </a:ext>
             </a:extLst>
           </p:cNvPr>
@@ -9725,7 +9725,7 @@
           <p:cNvPr id="10" name="">
             <a:extLst xmlns:a="http://schemas.openxmlformats.org/drawingml/2006/main">
               <a:ext uri="{FF2B5EF4-FFF2-40B4-BE49-F238E27FC236}">
-                <a16:creationId xmlns:a16="http://schemas.microsoft.com/office/drawing/2014/main" id="{A1274DF0-9122-4FDB-8BAF-FC54D9C70281}"/>
+                <a16:creationId xmlns:a16="http://schemas.microsoft.com/office/drawing/2014/main" id="{E4FF1ED5-DB7A-415A-A33B-D78E857093D4}"/>
               </a:ext>
             </a:extLst>
           </p:cNvPr>
@@ -10053,7 +10053,7 @@
           <p:cNvPr id="12" name="">
             <a:extLst xmlns:a="http://schemas.openxmlformats.org/drawingml/2006/main">
               <a:ext uri="{FF2B5EF4-FFF2-40B4-BE49-F238E27FC236}">
-                <a16:creationId xmlns:a16="http://schemas.microsoft.com/office/drawing/2014/main" id="{D1CC8AF5-AACB-4E9D-964E-672ECEC353F1}"/>
+                <a16:creationId xmlns:a16="http://schemas.microsoft.com/office/drawing/2014/main" id="{B0966BB1-39D4-4212-A214-C25924C46E9A}"/>
               </a:ext>
             </a:extLst>
           </p:cNvPr>
@@ -10131,7 +10131,7 @@
     </p:spTree>
     <p:extLst>
       <p:ext uri="{BB962C8B-B14F-4D97-AF65-F5344CB8AC3E}">
-        <p14:creationId xmlns:p14="http://schemas.microsoft.com/office/powerpoint/2010/main" val="749464071"/>
+        <p14:creationId xmlns:p14="http://schemas.microsoft.com/office/powerpoint/2010/main" val="1803169004"/>
       </p:ext>
     </p:extLst>
   </p:cSld>
